--- a/docs/routemind-demo-deck.pptx
+++ b/docs/routemind-demo-deck.pptx
@@ -3197,7 +3197,7 @@
         <p:spPr>
           <a:xfrm>
             <a:off x="566928" y="1572768"/>
-            <a:ext cx="7498079" cy="791464"/>
+            <a:ext cx="7498079" cy="924051"/>
           </a:xfrm>
           <a:prstGeom prst="rect">
             <a:avLst/>
@@ -3236,7 +3236,7 @@
         <p:spPr>
           <a:xfrm>
             <a:off x="566928" y="2670048"/>
-            <a:ext cx="6949440" cy="961643"/>
+            <a:ext cx="6949440" cy="1124864"/>
           </a:xfrm>
           <a:prstGeom prst="rect">
             <a:avLst/>
@@ -3319,7 +3319,7 @@
         <p:spPr>
           <a:xfrm>
             <a:off x="566928" y="4224528"/>
-            <a:ext cx="5486400" cy="200914"/>
+            <a:ext cx="5486400" cy="227202"/>
           </a:xfrm>
           <a:prstGeom prst="rect">
             <a:avLst/>
@@ -3357,8 +3357,8 @@
         </p:nvSpPr>
         <p:spPr>
           <a:xfrm>
-            <a:off x="566928" y="4526026"/>
-            <a:ext cx="5486400" cy="200914"/>
+            <a:off x="566928" y="4552315"/>
+            <a:ext cx="5486400" cy="227202"/>
           </a:xfrm>
           <a:prstGeom prst="rect">
             <a:avLst/>
@@ -3396,8 +3396,8 @@
         </p:nvSpPr>
         <p:spPr>
           <a:xfrm>
-            <a:off x="566928" y="4827524"/>
-            <a:ext cx="5486400" cy="200914"/>
+            <a:off x="566928" y="4880101"/>
+            <a:ext cx="5486400" cy="227202"/>
           </a:xfrm>
           <a:prstGeom prst="rect">
             <a:avLst/>
@@ -3435,8 +3435,8 @@
         </p:nvSpPr>
         <p:spPr>
           <a:xfrm>
-            <a:off x="566928" y="5129022"/>
-            <a:ext cx="5486400" cy="200914"/>
+            <a:off x="566928" y="5207888"/>
+            <a:ext cx="5486400" cy="227202"/>
           </a:xfrm>
           <a:prstGeom prst="rect">
             <a:avLst/>
@@ -3521,7 +3521,7 @@
         <p:spPr>
           <a:xfrm>
             <a:off x="8549640" y="1755648"/>
-            <a:ext cx="2834640" cy="211709"/>
+            <a:ext cx="2834640" cy="239941"/>
           </a:xfrm>
           <a:prstGeom prst="rect">
             <a:avLst/>
@@ -3560,7 +3560,7 @@
         <p:spPr>
           <a:xfrm>
             <a:off x="8549640" y="2029967"/>
-            <a:ext cx="2798064" cy="1007364"/>
+            <a:ext cx="2798064" cy="1178814"/>
           </a:xfrm>
           <a:prstGeom prst="rect">
             <a:avLst/>
@@ -3616,7 +3616,7 @@
         </p:nvSpPr>
         <p:spPr>
           <a:xfrm>
-            <a:off x="8549640" y="3311652"/>
+            <a:off x="8549640" y="3483102"/>
             <a:ext cx="2798064" cy="8229"/>
           </a:xfrm>
           <a:prstGeom prst="rect">
@@ -3660,8 +3660,8 @@
         </p:nvSpPr>
         <p:spPr>
           <a:xfrm>
-            <a:off x="8549640" y="3531107"/>
-            <a:ext cx="2798064" cy="1077214"/>
+            <a:off x="8549640" y="3702557"/>
+            <a:ext cx="2798064" cy="1261237"/>
           </a:xfrm>
           <a:prstGeom prst="rect">
             <a:avLst/>
@@ -3700,7 +3700,7 @@
         <p:spPr>
           <a:xfrm>
             <a:off x="566928" y="6455664"/>
-            <a:ext cx="11057839" cy="203454"/>
+            <a:ext cx="11057839" cy="230200"/>
           </a:xfrm>
           <a:prstGeom prst="rect">
             <a:avLst/>
@@ -3801,7 +3801,7 @@
         <p:spPr>
           <a:xfrm>
             <a:off x="566928" y="548640"/>
-            <a:ext cx="457200" cy="252984"/>
+            <a:ext cx="457200" cy="288645"/>
           </a:xfrm>
           <a:prstGeom prst="rect">
             <a:avLst/>
@@ -3840,7 +3840,7 @@
         <p:spPr>
           <a:xfrm>
             <a:off x="1097280" y="475488"/>
-            <a:ext cx="10509199" cy="211709"/>
+            <a:ext cx="10509199" cy="239941"/>
           </a:xfrm>
           <a:prstGeom prst="rect">
             <a:avLst/>
@@ -3879,7 +3879,7 @@
         <p:spPr>
           <a:xfrm>
             <a:off x="1097280" y="667512"/>
-            <a:ext cx="10509199" cy="414909"/>
+            <a:ext cx="10509199" cy="479717"/>
           </a:xfrm>
           <a:prstGeom prst="rect">
             <a:avLst/>
@@ -3918,7 +3918,7 @@
         <p:spPr>
           <a:xfrm>
             <a:off x="566928" y="1344168"/>
-            <a:ext cx="11057839" cy="277749"/>
+            <a:ext cx="11057839" cy="317868"/>
           </a:xfrm>
           <a:prstGeom prst="rect">
             <a:avLst/>
@@ -3956,8 +3956,8 @@
         </p:nvSpPr>
         <p:spPr>
           <a:xfrm>
-            <a:off x="566928" y="1960244"/>
-            <a:ext cx="5486400" cy="211709"/>
+            <a:off x="566928" y="2000364"/>
+            <a:ext cx="5486400" cy="239941"/>
           </a:xfrm>
           <a:prstGeom prst="rect">
             <a:avLst/>
@@ -3995,8 +3995,8 @@
         </p:nvSpPr>
         <p:spPr>
           <a:xfrm>
-            <a:off x="566928" y="2261996"/>
-            <a:ext cx="1737360" cy="244728"/>
+            <a:off x="566928" y="2302116"/>
+            <a:ext cx="1737360" cy="278904"/>
           </a:xfrm>
           <a:prstGeom prst="rect">
             <a:avLst/>
@@ -4034,7 +4034,7 @@
         </p:nvSpPr>
         <p:spPr>
           <a:xfrm>
-            <a:off x="2395728" y="2234564"/>
+            <a:off x="2395728" y="2274684"/>
             <a:ext cx="2761488" cy="276514"/>
           </a:xfrm>
           <a:prstGeom prst="rect">
@@ -4078,7 +4078,7 @@
         </p:nvSpPr>
         <p:spPr>
           <a:xfrm>
-            <a:off x="2395728" y="2234564"/>
+            <a:off x="2395728" y="2274684"/>
             <a:ext cx="2761488" cy="276514"/>
           </a:xfrm>
           <a:prstGeom prst="rect">
@@ -4122,8 +4122,8 @@
         </p:nvSpPr>
         <p:spPr>
           <a:xfrm>
-            <a:off x="5248656" y="2261996"/>
-            <a:ext cx="640080" cy="244728"/>
+            <a:off x="5248656" y="2302116"/>
+            <a:ext cx="640080" cy="278904"/>
           </a:xfrm>
           <a:prstGeom prst="rect">
             <a:avLst/>
@@ -4161,8 +4161,8 @@
         </p:nvSpPr>
         <p:spPr>
           <a:xfrm>
-            <a:off x="566928" y="2847212"/>
-            <a:ext cx="1737360" cy="244728"/>
+            <a:off x="566928" y="2887332"/>
+            <a:ext cx="1737360" cy="278904"/>
           </a:xfrm>
           <a:prstGeom prst="rect">
             <a:avLst/>
@@ -4200,7 +4200,7 @@
         </p:nvSpPr>
         <p:spPr>
           <a:xfrm>
-            <a:off x="2395728" y="2819781"/>
+            <a:off x="2395728" y="2859900"/>
             <a:ext cx="2761488" cy="276514"/>
           </a:xfrm>
           <a:prstGeom prst="rect">
@@ -4244,7 +4244,7 @@
         </p:nvSpPr>
         <p:spPr>
           <a:xfrm>
-            <a:off x="2395728" y="2819781"/>
+            <a:off x="2395728" y="2859900"/>
             <a:ext cx="151881" cy="276514"/>
           </a:xfrm>
           <a:prstGeom prst="rect">
@@ -4288,8 +4288,8 @@
         </p:nvSpPr>
         <p:spPr>
           <a:xfrm>
-            <a:off x="5248656" y="2847212"/>
-            <a:ext cx="640080" cy="244728"/>
+            <a:off x="5248656" y="2887332"/>
+            <a:ext cx="640080" cy="278904"/>
           </a:xfrm>
           <a:prstGeom prst="rect">
             <a:avLst/>
@@ -4327,8 +4327,8 @@
         </p:nvSpPr>
         <p:spPr>
           <a:xfrm>
-            <a:off x="566928" y="3432428"/>
-            <a:ext cx="1737360" cy="244728"/>
+            <a:off x="566928" y="3472548"/>
+            <a:ext cx="1737360" cy="278904"/>
           </a:xfrm>
           <a:prstGeom prst="rect">
             <a:avLst/>
@@ -4366,7 +4366,7 @@
         </p:nvSpPr>
         <p:spPr>
           <a:xfrm>
-            <a:off x="2395728" y="3404997"/>
+            <a:off x="2395728" y="3445116"/>
             <a:ext cx="2761488" cy="276514"/>
           </a:xfrm>
           <a:prstGeom prst="rect">
@@ -4410,7 +4410,7 @@
         </p:nvSpPr>
         <p:spPr>
           <a:xfrm>
-            <a:off x="2395728" y="3404997"/>
+            <a:off x="2395728" y="3445116"/>
             <a:ext cx="32004" cy="276514"/>
           </a:xfrm>
           <a:prstGeom prst="rect">
@@ -4454,8 +4454,8 @@
         </p:nvSpPr>
         <p:spPr>
           <a:xfrm>
-            <a:off x="5248656" y="3432428"/>
-            <a:ext cx="640080" cy="244728"/>
+            <a:off x="5248656" y="3472548"/>
+            <a:ext cx="640080" cy="278904"/>
           </a:xfrm>
           <a:prstGeom prst="rect">
             <a:avLst/>
@@ -4493,7 +4493,7 @@
         </p:nvSpPr>
         <p:spPr>
           <a:xfrm>
-            <a:off x="566928" y="4264532"/>
+            <a:off x="566928" y="4304652"/>
             <a:ext cx="5394960" cy="713232"/>
           </a:xfrm>
           <a:prstGeom prst="rect">
@@ -4537,8 +4537,8 @@
         </p:nvSpPr>
         <p:spPr>
           <a:xfrm>
-            <a:off x="804672" y="4447413"/>
-            <a:ext cx="4937760" cy="484124"/>
+            <a:off x="804672" y="4487532"/>
+            <a:ext cx="4937760" cy="561390"/>
           </a:xfrm>
           <a:prstGeom prst="rect">
             <a:avLst/>
@@ -4585,8 +4585,8 @@
         </p:nvSpPr>
         <p:spPr>
           <a:xfrm>
-            <a:off x="6601968" y="1960244"/>
-            <a:ext cx="5577840" cy="211709"/>
+            <a:off x="6601968" y="2000364"/>
+            <a:ext cx="5577840" cy="239941"/>
           </a:xfrm>
           <a:prstGeom prst="rect">
             <a:avLst/>
@@ -4624,8 +4624,8 @@
         </p:nvSpPr>
         <p:spPr>
           <a:xfrm>
-            <a:off x="6601968" y="2234564"/>
-            <a:ext cx="5532120" cy="748284"/>
+            <a:off x="6601968" y="2274684"/>
+            <a:ext cx="5532120" cy="873099"/>
           </a:xfrm>
           <a:prstGeom prst="rect">
             <a:avLst/>
@@ -4663,8 +4663,8 @@
         </p:nvSpPr>
         <p:spPr>
           <a:xfrm>
-            <a:off x="6601968" y="3293744"/>
-            <a:ext cx="5532120" cy="1411224"/>
+            <a:off x="6601968" y="3458679"/>
+            <a:ext cx="5532120" cy="1622450"/>
           </a:xfrm>
           <a:prstGeom prst="rect">
             <a:avLst/>
@@ -4709,8 +4709,8 @@
         </p:nvSpPr>
         <p:spPr>
           <a:xfrm>
-            <a:off x="6601968" y="3293744"/>
-            <a:ext cx="21945" cy="1411224"/>
+            <a:off x="6601968" y="3458679"/>
+            <a:ext cx="21945" cy="1622450"/>
           </a:xfrm>
           <a:prstGeom prst="rect">
             <a:avLst/>
@@ -4753,8 +4753,8 @@
         </p:nvSpPr>
         <p:spPr>
           <a:xfrm>
-            <a:off x="6748272" y="3412616"/>
-            <a:ext cx="5294376" cy="1191768"/>
+            <a:off x="6748272" y="3577551"/>
+            <a:ext cx="5294376" cy="1402994"/>
           </a:xfrm>
           <a:prstGeom prst="rect">
             <a:avLst/>
@@ -4909,7 +4909,7 @@
         <p:spPr>
           <a:xfrm>
             <a:off x="566928" y="6455664"/>
-            <a:ext cx="11057839" cy="203454"/>
+            <a:ext cx="11057839" cy="230200"/>
           </a:xfrm>
           <a:prstGeom prst="rect">
             <a:avLst/>
@@ -5010,7 +5010,7 @@
         <p:spPr>
           <a:xfrm>
             <a:off x="566928" y="548640"/>
-            <a:ext cx="457200" cy="252984"/>
+            <a:ext cx="457200" cy="288645"/>
           </a:xfrm>
           <a:prstGeom prst="rect">
             <a:avLst/>
@@ -5049,7 +5049,7 @@
         <p:spPr>
           <a:xfrm>
             <a:off x="1097280" y="475488"/>
-            <a:ext cx="10509199" cy="211709"/>
+            <a:ext cx="10509199" cy="239941"/>
           </a:xfrm>
           <a:prstGeom prst="rect">
             <a:avLst/>
@@ -5088,7 +5088,7 @@
         <p:spPr>
           <a:xfrm>
             <a:off x="1097280" y="667512"/>
-            <a:ext cx="10509199" cy="414909"/>
+            <a:ext cx="10509199" cy="479717"/>
           </a:xfrm>
           <a:prstGeom prst="rect">
             <a:avLst/>
@@ -5127,7 +5127,7 @@
         <p:spPr>
           <a:xfrm>
             <a:off x="566928" y="1344168"/>
-            <a:ext cx="11057839" cy="500634"/>
+            <a:ext cx="11057839" cy="580872"/>
           </a:xfrm>
           <a:prstGeom prst="rect">
             <a:avLst/>
@@ -5165,8 +5165,8 @@
         </p:nvSpPr>
         <p:spPr>
           <a:xfrm>
-            <a:off x="566928" y="2045969"/>
-            <a:ext cx="6675120" cy="211709"/>
+            <a:off x="566928" y="2126208"/>
+            <a:ext cx="6675120" cy="239941"/>
           </a:xfrm>
           <a:prstGeom prst="rect">
             <a:avLst/>
@@ -5204,8 +5204,8 @@
         </p:nvSpPr>
         <p:spPr>
           <a:xfrm>
-            <a:off x="566928" y="2320289"/>
-            <a:ext cx="6629400" cy="1544574"/>
+            <a:off x="566928" y="2400528"/>
+            <a:ext cx="6629400" cy="1779803"/>
           </a:xfrm>
           <a:prstGeom prst="rect">
             <a:avLst/>
@@ -5250,8 +5250,8 @@
         </p:nvSpPr>
         <p:spPr>
           <a:xfrm>
-            <a:off x="566928" y="2320289"/>
-            <a:ext cx="21945" cy="1544574"/>
+            <a:off x="566928" y="2400528"/>
+            <a:ext cx="21945" cy="1779803"/>
           </a:xfrm>
           <a:prstGeom prst="rect">
             <a:avLst/>
@@ -5294,8 +5294,8 @@
         </p:nvSpPr>
         <p:spPr>
           <a:xfrm>
-            <a:off x="713232" y="2439161"/>
-            <a:ext cx="6391656" cy="1325118"/>
+            <a:off x="713232" y="2519400"/>
+            <a:ext cx="6391656" cy="1560347"/>
           </a:xfrm>
           <a:prstGeom prst="rect">
             <a:avLst/>
@@ -5483,8 +5483,8 @@
         </p:nvSpPr>
         <p:spPr>
           <a:xfrm>
-            <a:off x="566928" y="4139183"/>
-            <a:ext cx="20116" cy="413766"/>
+            <a:off x="566928" y="4454651"/>
+            <a:ext cx="20116" cy="481660"/>
           </a:xfrm>
           <a:prstGeom prst="rect">
             <a:avLst/>
@@ -5527,8 +5527,8 @@
         </p:nvSpPr>
         <p:spPr>
           <a:xfrm>
-            <a:off x="731520" y="4139183"/>
-            <a:ext cx="6464808" cy="432054"/>
+            <a:off x="731520" y="4454651"/>
+            <a:ext cx="6464808" cy="499948"/>
           </a:xfrm>
           <a:prstGeom prst="rect">
             <a:avLst/>
@@ -5566,8 +5566,8 @@
         </p:nvSpPr>
         <p:spPr>
           <a:xfrm>
-            <a:off x="7653527" y="2045969"/>
-            <a:ext cx="4526280" cy="211709"/>
+            <a:off x="7653527" y="2126208"/>
+            <a:ext cx="4526280" cy="239941"/>
           </a:xfrm>
           <a:prstGeom prst="rect">
             <a:avLst/>
@@ -5605,8 +5605,8 @@
         </p:nvSpPr>
         <p:spPr>
           <a:xfrm>
-            <a:off x="7653527" y="2320289"/>
-            <a:ext cx="2462479" cy="195199"/>
+            <a:off x="7653527" y="2400528"/>
+            <a:ext cx="2462479" cy="220459"/>
           </a:xfrm>
           <a:prstGeom prst="rect">
             <a:avLst/>
@@ -5644,8 +5644,8 @@
         </p:nvSpPr>
         <p:spPr>
           <a:xfrm>
-            <a:off x="10207447" y="2320289"/>
-            <a:ext cx="1835200" cy="195199"/>
+            <a:off x="10207447" y="2400528"/>
+            <a:ext cx="1835200" cy="220459"/>
           </a:xfrm>
           <a:prstGeom prst="rect">
             <a:avLst/>
@@ -5683,7 +5683,7 @@
         </p:nvSpPr>
         <p:spPr>
           <a:xfrm>
-            <a:off x="7653527" y="2558033"/>
+            <a:off x="7653527" y="2638272"/>
             <a:ext cx="4480560" cy="8229"/>
           </a:xfrm>
           <a:prstGeom prst="rect">
@@ -5727,8 +5727,8 @@
         </p:nvSpPr>
         <p:spPr>
           <a:xfrm>
-            <a:off x="7653527" y="2649473"/>
-            <a:ext cx="2462479" cy="253301"/>
+            <a:off x="7653527" y="2729712"/>
+            <a:ext cx="2462479" cy="289020"/>
           </a:xfrm>
           <a:prstGeom prst="rect">
             <a:avLst/>
@@ -5766,8 +5766,8 @@
         </p:nvSpPr>
         <p:spPr>
           <a:xfrm>
-            <a:off x="10207447" y="2649473"/>
-            <a:ext cx="1835200" cy="253301"/>
+            <a:off x="10207447" y="2729712"/>
+            <a:ext cx="1835200" cy="289020"/>
           </a:xfrm>
           <a:prstGeom prst="rect">
             <a:avLst/>
@@ -5805,7 +5805,7 @@
         </p:nvSpPr>
         <p:spPr>
           <a:xfrm>
-            <a:off x="7653527" y="2969513"/>
+            <a:off x="7653527" y="3064452"/>
             <a:ext cx="4480560" cy="8229"/>
           </a:xfrm>
           <a:prstGeom prst="rect">
@@ -5849,8 +5849,8 @@
         </p:nvSpPr>
         <p:spPr>
           <a:xfrm>
-            <a:off x="7653527" y="3070097"/>
-            <a:ext cx="2462479" cy="253301"/>
+            <a:off x="7653527" y="3165036"/>
+            <a:ext cx="2462479" cy="289020"/>
           </a:xfrm>
           <a:prstGeom prst="rect">
             <a:avLst/>
@@ -5888,8 +5888,8 @@
         </p:nvSpPr>
         <p:spPr>
           <a:xfrm>
-            <a:off x="10207447" y="3070097"/>
-            <a:ext cx="1835200" cy="253301"/>
+            <a:off x="10207447" y="3165036"/>
+            <a:ext cx="1835200" cy="289020"/>
           </a:xfrm>
           <a:prstGeom prst="rect">
             <a:avLst/>
@@ -5927,7 +5927,7 @@
         </p:nvSpPr>
         <p:spPr>
           <a:xfrm>
-            <a:off x="7653527" y="3390137"/>
+            <a:off x="7653527" y="3499777"/>
             <a:ext cx="4480560" cy="8229"/>
           </a:xfrm>
           <a:prstGeom prst="rect">
@@ -5971,8 +5971,8 @@
         </p:nvSpPr>
         <p:spPr>
           <a:xfrm>
-            <a:off x="7653527" y="3490721"/>
-            <a:ext cx="2462479" cy="253301"/>
+            <a:off x="7653527" y="3600361"/>
+            <a:ext cx="2462479" cy="289020"/>
           </a:xfrm>
           <a:prstGeom prst="rect">
             <a:avLst/>
@@ -6010,8 +6010,8 @@
         </p:nvSpPr>
         <p:spPr>
           <a:xfrm>
-            <a:off x="10207447" y="3490721"/>
-            <a:ext cx="1835200" cy="253301"/>
+            <a:off x="10207447" y="3600361"/>
+            <a:ext cx="1835200" cy="289020"/>
           </a:xfrm>
           <a:prstGeom prst="rect">
             <a:avLst/>
@@ -6049,8 +6049,8 @@
         </p:nvSpPr>
         <p:spPr>
           <a:xfrm>
-            <a:off x="7653527" y="4222242"/>
-            <a:ext cx="4526280" cy="211709"/>
+            <a:off x="7653527" y="4346581"/>
+            <a:ext cx="4526280" cy="239941"/>
           </a:xfrm>
           <a:prstGeom prst="rect">
             <a:avLst/>
@@ -6088,8 +6088,8 @@
         </p:nvSpPr>
         <p:spPr>
           <a:xfrm>
-            <a:off x="7653527" y="4496562"/>
-            <a:ext cx="4480560" cy="943863"/>
+            <a:off x="7653527" y="4620901"/>
+            <a:ext cx="4480560" cy="1103884"/>
           </a:xfrm>
           <a:prstGeom prst="rect">
             <a:avLst/>
@@ -6128,7 +6128,7 @@
         <p:spPr>
           <a:xfrm>
             <a:off x="566928" y="6455664"/>
-            <a:ext cx="11057839" cy="203454"/>
+            <a:ext cx="11057839" cy="230200"/>
           </a:xfrm>
           <a:prstGeom prst="rect">
             <a:avLst/>
@@ -6229,7 +6229,7 @@
         <p:spPr>
           <a:xfrm>
             <a:off x="566928" y="548640"/>
-            <a:ext cx="457200" cy="252984"/>
+            <a:ext cx="457200" cy="288645"/>
           </a:xfrm>
           <a:prstGeom prst="rect">
             <a:avLst/>
@@ -6268,7 +6268,7 @@
         <p:spPr>
           <a:xfrm>
             <a:off x="1097280" y="475488"/>
-            <a:ext cx="10509199" cy="211709"/>
+            <a:ext cx="10509199" cy="239941"/>
           </a:xfrm>
           <a:prstGeom prst="rect">
             <a:avLst/>
@@ -6307,7 +6307,7 @@
         <p:spPr>
           <a:xfrm>
             <a:off x="1097280" y="667512"/>
-            <a:ext cx="10509199" cy="414909"/>
+            <a:ext cx="10509199" cy="479717"/>
           </a:xfrm>
           <a:prstGeom prst="rect">
             <a:avLst/>
@@ -6346,7 +6346,7 @@
         <p:spPr>
           <a:xfrm>
             <a:off x="566928" y="1344168"/>
-            <a:ext cx="11057839" cy="500634"/>
+            <a:ext cx="11057839" cy="580872"/>
           </a:xfrm>
           <a:prstGeom prst="rect">
             <a:avLst/>
@@ -6384,7 +6384,7 @@
         </p:nvSpPr>
         <p:spPr>
           <a:xfrm>
-            <a:off x="1938528" y="2091689"/>
+            <a:off x="1938528" y="2171928"/>
             <a:ext cx="1838858" cy="246888"/>
           </a:xfrm>
           <a:prstGeom prst="rect">
@@ -6439,7 +6439,7 @@
         </p:nvSpPr>
         <p:spPr>
           <a:xfrm>
-            <a:off x="3859682" y="2091689"/>
+            <a:off x="3859682" y="2171928"/>
             <a:ext cx="1416405" cy="246888"/>
           </a:xfrm>
           <a:prstGeom prst="rect">
@@ -6494,7 +6494,7 @@
         </p:nvSpPr>
         <p:spPr>
           <a:xfrm>
-            <a:off x="5358384" y="2091689"/>
+            <a:off x="5358384" y="2171928"/>
             <a:ext cx="2402128" cy="246888"/>
           </a:xfrm>
           <a:prstGeom prst="rect">
@@ -6549,8 +6549,8 @@
         </p:nvSpPr>
         <p:spPr>
           <a:xfrm>
-            <a:off x="566928" y="2137409"/>
-            <a:ext cx="1280160" cy="211709"/>
+            <a:off x="566928" y="2217648"/>
+            <a:ext cx="1280160" cy="239941"/>
           </a:xfrm>
           <a:prstGeom prst="rect">
             <a:avLst/>
@@ -6588,7 +6588,7 @@
         </p:nvSpPr>
         <p:spPr>
           <a:xfrm>
-            <a:off x="566928" y="2484882"/>
+            <a:off x="566928" y="2565120"/>
             <a:ext cx="11057839" cy="8229"/>
           </a:xfrm>
           <a:prstGeom prst="rect">
@@ -6632,7 +6632,7 @@
         </p:nvSpPr>
         <p:spPr>
           <a:xfrm>
-            <a:off x="1938528" y="2612898"/>
+            <a:off x="1938528" y="2693136"/>
             <a:ext cx="782726" cy="246888"/>
           </a:xfrm>
           <a:prstGeom prst="rect">
@@ -6687,7 +6687,7 @@
         </p:nvSpPr>
         <p:spPr>
           <a:xfrm>
-            <a:off x="2803550" y="2612898"/>
+            <a:off x="2803550" y="2693136"/>
             <a:ext cx="1134770" cy="246888"/>
           </a:xfrm>
           <a:prstGeom prst="rect">
@@ -6742,7 +6742,7 @@
         </p:nvSpPr>
         <p:spPr>
           <a:xfrm>
-            <a:off x="4020616" y="2612898"/>
+            <a:off x="4020616" y="2693136"/>
             <a:ext cx="1557223" cy="246888"/>
           </a:xfrm>
           <a:prstGeom prst="rect">
@@ -6797,7 +6797,7 @@
         </p:nvSpPr>
         <p:spPr>
           <a:xfrm>
-            <a:off x="5660136" y="2612898"/>
+            <a:off x="5660136" y="2693136"/>
             <a:ext cx="923544" cy="246888"/>
           </a:xfrm>
           <a:prstGeom prst="rect">
@@ -6852,7 +6852,7 @@
         </p:nvSpPr>
         <p:spPr>
           <a:xfrm>
-            <a:off x="6665976" y="2612898"/>
+            <a:off x="6665976" y="2693136"/>
             <a:ext cx="1838858" cy="246888"/>
           </a:xfrm>
           <a:prstGeom prst="rect">
@@ -6907,7 +6907,7 @@
         </p:nvSpPr>
         <p:spPr>
           <a:xfrm>
-            <a:off x="8587130" y="2612898"/>
+            <a:off x="8587130" y="2693136"/>
             <a:ext cx="1345996" cy="246888"/>
           </a:xfrm>
           <a:prstGeom prst="rect">
@@ -6962,7 +6962,7 @@
         </p:nvSpPr>
         <p:spPr>
           <a:xfrm>
-            <a:off x="10015423" y="2612898"/>
+            <a:off x="10015423" y="2693136"/>
             <a:ext cx="712317" cy="246888"/>
           </a:xfrm>
           <a:prstGeom prst="rect">
@@ -7017,7 +7017,7 @@
         </p:nvSpPr>
         <p:spPr>
           <a:xfrm>
-            <a:off x="1938528" y="2942082"/>
+            <a:off x="1938528" y="3022320"/>
             <a:ext cx="1557223" cy="246888"/>
           </a:xfrm>
           <a:prstGeom prst="rect">
@@ -7072,7 +7072,7 @@
         </p:nvSpPr>
         <p:spPr>
           <a:xfrm>
-            <a:off x="3578047" y="2942082"/>
+            <a:off x="3578047" y="3022320"/>
             <a:ext cx="571500" cy="246888"/>
           </a:xfrm>
           <a:prstGeom prst="rect">
@@ -7127,7 +7127,7 @@
         </p:nvSpPr>
         <p:spPr>
           <a:xfrm>
-            <a:off x="4231843" y="2942082"/>
+            <a:off x="4231843" y="3022320"/>
             <a:ext cx="501091" cy="246888"/>
           </a:xfrm>
           <a:prstGeom prst="rect">
@@ -7182,7 +7182,7 @@
         </p:nvSpPr>
         <p:spPr>
           <a:xfrm>
-            <a:off x="4815230" y="2942082"/>
+            <a:off x="4815230" y="3022320"/>
             <a:ext cx="571500" cy="246888"/>
           </a:xfrm>
           <a:prstGeom prst="rect">
@@ -7237,7 +7237,7 @@
         </p:nvSpPr>
         <p:spPr>
           <a:xfrm>
-            <a:off x="5469026" y="2942082"/>
+            <a:off x="5469026" y="3022320"/>
             <a:ext cx="641908" cy="246888"/>
           </a:xfrm>
           <a:prstGeom prst="rect">
@@ -7292,7 +7292,7 @@
         </p:nvSpPr>
         <p:spPr>
           <a:xfrm>
-            <a:off x="6193231" y="2942082"/>
+            <a:off x="6193231" y="3022320"/>
             <a:ext cx="712317" cy="246888"/>
           </a:xfrm>
           <a:prstGeom prst="rect">
@@ -7347,8 +7347,8 @@
         </p:nvSpPr>
         <p:spPr>
           <a:xfrm>
-            <a:off x="566928" y="2658618"/>
-            <a:ext cx="1280160" cy="211709"/>
+            <a:off x="566928" y="2738856"/>
+            <a:ext cx="1280160" cy="239941"/>
           </a:xfrm>
           <a:prstGeom prst="rect">
             <a:avLst/>
@@ -7386,7 +7386,7 @@
         </p:nvSpPr>
         <p:spPr>
           <a:xfrm>
-            <a:off x="566928" y="3335274"/>
+            <a:off x="566928" y="3415512"/>
             <a:ext cx="11057839" cy="8229"/>
           </a:xfrm>
           <a:prstGeom prst="rect">
@@ -7430,7 +7430,7 @@
         </p:nvSpPr>
         <p:spPr>
           <a:xfrm>
-            <a:off x="1938528" y="3463290"/>
+            <a:off x="1938528" y="3543528"/>
             <a:ext cx="1909267" cy="246888"/>
           </a:xfrm>
           <a:prstGeom prst="rect">
@@ -7485,7 +7485,7 @@
         </p:nvSpPr>
         <p:spPr>
           <a:xfrm>
-            <a:off x="3930091" y="3463290"/>
+            <a:off x="3930091" y="3543528"/>
             <a:ext cx="1557223" cy="246888"/>
           </a:xfrm>
           <a:prstGeom prst="rect">
@@ -7540,7 +7540,7 @@
         </p:nvSpPr>
         <p:spPr>
           <a:xfrm>
-            <a:off x="5569610" y="3463290"/>
+            <a:off x="5569610" y="3543528"/>
             <a:ext cx="1064361" cy="246888"/>
           </a:xfrm>
           <a:prstGeom prst="rect">
@@ -7595,7 +7595,7 @@
         </p:nvSpPr>
         <p:spPr>
           <a:xfrm>
-            <a:off x="6716268" y="3463290"/>
+            <a:off x="6716268" y="3543528"/>
             <a:ext cx="1275588" cy="246888"/>
           </a:xfrm>
           <a:prstGeom prst="rect">
@@ -7650,7 +7650,7 @@
         </p:nvSpPr>
         <p:spPr>
           <a:xfrm>
-            <a:off x="8074152" y="3463290"/>
+            <a:off x="8074152" y="3543528"/>
             <a:ext cx="1557223" cy="246888"/>
           </a:xfrm>
           <a:prstGeom prst="rect">
@@ -7705,7 +7705,7 @@
         </p:nvSpPr>
         <p:spPr>
           <a:xfrm>
-            <a:off x="9713671" y="3463290"/>
+            <a:off x="9713671" y="3543528"/>
             <a:ext cx="782726" cy="246888"/>
           </a:xfrm>
           <a:prstGeom prst="rect">
@@ -7760,7 +7760,7 @@
         </p:nvSpPr>
         <p:spPr>
           <a:xfrm>
-            <a:off x="1938528" y="3792474"/>
+            <a:off x="1938528" y="3872712"/>
             <a:ext cx="1134770" cy="246888"/>
           </a:xfrm>
           <a:prstGeom prst="rect">
@@ -7815,7 +7815,7 @@
         </p:nvSpPr>
         <p:spPr>
           <a:xfrm>
-            <a:off x="3155594" y="3792474"/>
+            <a:off x="3155594" y="3872712"/>
             <a:ext cx="1345996" cy="246888"/>
           </a:xfrm>
           <a:prstGeom prst="rect">
@@ -7870,7 +7870,7 @@
         </p:nvSpPr>
         <p:spPr>
           <a:xfrm>
-            <a:off x="4583887" y="3792474"/>
+            <a:off x="4583887" y="3872712"/>
             <a:ext cx="1134770" cy="246888"/>
           </a:xfrm>
           <a:prstGeom prst="rect">
@@ -7925,7 +7925,7 @@
         </p:nvSpPr>
         <p:spPr>
           <a:xfrm>
-            <a:off x="5800953" y="3792474"/>
+            <a:off x="5800953" y="3872712"/>
             <a:ext cx="1345996" cy="246888"/>
           </a:xfrm>
           <a:prstGeom prst="rect">
@@ -7980,8 +7980,8 @@
         </p:nvSpPr>
         <p:spPr>
           <a:xfrm>
-            <a:off x="566928" y="3509010"/>
-            <a:ext cx="1280160" cy="211709"/>
+            <a:off x="566928" y="3589248"/>
+            <a:ext cx="1280160" cy="239941"/>
           </a:xfrm>
           <a:prstGeom prst="rect">
             <a:avLst/>
@@ -8019,7 +8019,7 @@
         </p:nvSpPr>
         <p:spPr>
           <a:xfrm>
-            <a:off x="566928" y="4185666"/>
+            <a:off x="566928" y="4265904"/>
             <a:ext cx="11057839" cy="8229"/>
           </a:xfrm>
           <a:prstGeom prst="rect">
@@ -8063,7 +8063,7 @@
         </p:nvSpPr>
         <p:spPr>
           <a:xfrm>
-            <a:off x="1938528" y="4313682"/>
+            <a:off x="1938528" y="4393920"/>
             <a:ext cx="430682" cy="246888"/>
           </a:xfrm>
           <a:prstGeom prst="rect">
@@ -8118,7 +8118,7 @@
         </p:nvSpPr>
         <p:spPr>
           <a:xfrm>
-            <a:off x="2451506" y="4313682"/>
+            <a:off x="2451506" y="4393920"/>
             <a:ext cx="1134770" cy="246888"/>
           </a:xfrm>
           <a:prstGeom prst="rect">
@@ -8173,7 +8173,7 @@
         </p:nvSpPr>
         <p:spPr>
           <a:xfrm>
-            <a:off x="3668572" y="4313682"/>
+            <a:off x="3668572" y="4393920"/>
             <a:ext cx="1064361" cy="246888"/>
           </a:xfrm>
           <a:prstGeom prst="rect">
@@ -8228,7 +8228,7 @@
         </p:nvSpPr>
         <p:spPr>
           <a:xfrm>
-            <a:off x="4815230" y="4313682"/>
+            <a:off x="4815230" y="4393920"/>
             <a:ext cx="923544" cy="246888"/>
           </a:xfrm>
           <a:prstGeom prst="rect">
@@ -8283,7 +8283,7 @@
         </p:nvSpPr>
         <p:spPr>
           <a:xfrm>
-            <a:off x="5821070" y="4313682"/>
+            <a:off x="5821070" y="4393920"/>
             <a:ext cx="1627632" cy="246888"/>
           </a:xfrm>
           <a:prstGeom prst="rect">
@@ -8338,7 +8338,7 @@
         </p:nvSpPr>
         <p:spPr>
           <a:xfrm>
-            <a:off x="7530998" y="4313682"/>
+            <a:off x="7530998" y="4393920"/>
             <a:ext cx="1345996" cy="246888"/>
           </a:xfrm>
           <a:prstGeom prst="rect">
@@ -8393,7 +8393,7 @@
         </p:nvSpPr>
         <p:spPr>
           <a:xfrm>
-            <a:off x="8959291" y="4313682"/>
+            <a:off x="8959291" y="4393920"/>
             <a:ext cx="782726" cy="246888"/>
           </a:xfrm>
           <a:prstGeom prst="rect">
@@ -8448,7 +8448,7 @@
         </p:nvSpPr>
         <p:spPr>
           <a:xfrm>
-            <a:off x="9824313" y="4313682"/>
+            <a:off x="9824313" y="4393920"/>
             <a:ext cx="1416405" cy="246888"/>
           </a:xfrm>
           <a:prstGeom prst="rect">
@@ -8503,7 +8503,7 @@
         </p:nvSpPr>
         <p:spPr>
           <a:xfrm>
-            <a:off x="1938528" y="4642866"/>
+            <a:off x="1938528" y="4723104"/>
             <a:ext cx="1345996" cy="246888"/>
           </a:xfrm>
           <a:prstGeom prst="rect">
@@ -8558,8 +8558,8 @@
         </p:nvSpPr>
         <p:spPr>
           <a:xfrm>
-            <a:off x="566928" y="4359402"/>
-            <a:ext cx="1280160" cy="211709"/>
+            <a:off x="566928" y="4439640"/>
+            <a:ext cx="1280160" cy="239941"/>
           </a:xfrm>
           <a:prstGeom prst="rect">
             <a:avLst/>
@@ -8597,7 +8597,7 @@
         </p:nvSpPr>
         <p:spPr>
           <a:xfrm>
-            <a:off x="566928" y="5036058"/>
+            <a:off x="566928" y="5116296"/>
             <a:ext cx="11057839" cy="8229"/>
           </a:xfrm>
           <a:prstGeom prst="rect">
@@ -8641,7 +8641,7 @@
         </p:nvSpPr>
         <p:spPr>
           <a:xfrm>
-            <a:off x="1938528" y="5164074"/>
+            <a:off x="1938528" y="5244312"/>
             <a:ext cx="1627632" cy="246888"/>
           </a:xfrm>
           <a:prstGeom prst="rect">
@@ -8696,7 +8696,7 @@
         </p:nvSpPr>
         <p:spPr>
           <a:xfrm>
-            <a:off x="3648456" y="5164074"/>
+            <a:off x="3648456" y="5244312"/>
             <a:ext cx="1838858" cy="246888"/>
           </a:xfrm>
           <a:prstGeom prst="rect">
@@ -8751,7 +8751,7 @@
         </p:nvSpPr>
         <p:spPr>
           <a:xfrm>
-            <a:off x="5569610" y="5164074"/>
+            <a:off x="5569610" y="5244312"/>
             <a:ext cx="2120493" cy="246888"/>
           </a:xfrm>
           <a:prstGeom prst="rect">
@@ -8806,7 +8806,7 @@
         </p:nvSpPr>
         <p:spPr>
           <a:xfrm>
-            <a:off x="7772400" y="5164074"/>
+            <a:off x="7772400" y="5244312"/>
             <a:ext cx="1416405" cy="246888"/>
           </a:xfrm>
           <a:prstGeom prst="rect">
@@ -8861,8 +8861,8 @@
         </p:nvSpPr>
         <p:spPr>
           <a:xfrm>
-            <a:off x="566928" y="5209794"/>
-            <a:ext cx="1280160" cy="211709"/>
+            <a:off x="566928" y="5290032"/>
+            <a:ext cx="1280160" cy="239941"/>
           </a:xfrm>
           <a:prstGeom prst="rect">
             <a:avLst/>
@@ -8900,7 +8900,7 @@
         </p:nvSpPr>
         <p:spPr>
           <a:xfrm>
-            <a:off x="566928" y="5557266"/>
+            <a:off x="566928" y="5637504"/>
             <a:ext cx="11057839" cy="8229"/>
           </a:xfrm>
           <a:prstGeom prst="rect">
@@ -8944,7 +8944,7 @@
         </p:nvSpPr>
         <p:spPr>
           <a:xfrm>
-            <a:off x="1938528" y="5685282"/>
+            <a:off x="1938528" y="5765520"/>
             <a:ext cx="1698040" cy="246888"/>
           </a:xfrm>
           <a:prstGeom prst="rect">
@@ -8999,7 +8999,7 @@
         </p:nvSpPr>
         <p:spPr>
           <a:xfrm>
-            <a:off x="3718864" y="5685282"/>
+            <a:off x="3718864" y="5765520"/>
             <a:ext cx="1345996" cy="246888"/>
           </a:xfrm>
           <a:prstGeom prst="rect">
@@ -9054,7 +9054,7 @@
         </p:nvSpPr>
         <p:spPr>
           <a:xfrm>
-            <a:off x="5147157" y="5685282"/>
+            <a:off x="5147157" y="5765520"/>
             <a:ext cx="1979676" cy="246888"/>
           </a:xfrm>
           <a:prstGeom prst="rect">
@@ -9109,8 +9109,8 @@
         </p:nvSpPr>
         <p:spPr>
           <a:xfrm>
-            <a:off x="566928" y="5731002"/>
-            <a:ext cx="1280160" cy="211709"/>
+            <a:off x="566928" y="5811240"/>
+            <a:ext cx="1280160" cy="239941"/>
           </a:xfrm>
           <a:prstGeom prst="rect">
             <a:avLst/>
@@ -9148,7 +9148,7 @@
         </p:nvSpPr>
         <p:spPr>
           <a:xfrm>
-            <a:off x="566928" y="6078474"/>
+            <a:off x="566928" y="6158712"/>
             <a:ext cx="11057839" cy="8229"/>
           </a:xfrm>
           <a:prstGeom prst="rect">
@@ -9192,7 +9192,7 @@
         </p:nvSpPr>
         <p:spPr>
           <a:xfrm>
-            <a:off x="1938528" y="6206490"/>
+            <a:off x="1938528" y="6286728"/>
             <a:ext cx="1698040" cy="246888"/>
           </a:xfrm>
           <a:prstGeom prst="rect">
@@ -9247,7 +9247,7 @@
         </p:nvSpPr>
         <p:spPr>
           <a:xfrm>
-            <a:off x="3718864" y="6206490"/>
+            <a:off x="3718864" y="6286728"/>
             <a:ext cx="1557223" cy="246888"/>
           </a:xfrm>
           <a:prstGeom prst="rect">
@@ -9302,7 +9302,7 @@
         </p:nvSpPr>
         <p:spPr>
           <a:xfrm>
-            <a:off x="5358384" y="6206490"/>
+            <a:off x="5358384" y="6286728"/>
             <a:ext cx="1064361" cy="246888"/>
           </a:xfrm>
           <a:prstGeom prst="rect">
@@ -9357,7 +9357,7 @@
         </p:nvSpPr>
         <p:spPr>
           <a:xfrm>
-            <a:off x="6505041" y="6206490"/>
+            <a:off x="6505041" y="6286728"/>
             <a:ext cx="1134770" cy="246888"/>
           </a:xfrm>
           <a:prstGeom prst="rect">
@@ -9412,7 +9412,7 @@
         </p:nvSpPr>
         <p:spPr>
           <a:xfrm>
-            <a:off x="7722108" y="6206490"/>
+            <a:off x="7722108" y="6286728"/>
             <a:ext cx="2050084" cy="246888"/>
           </a:xfrm>
           <a:prstGeom prst="rect">
@@ -9467,8 +9467,8 @@
         </p:nvSpPr>
         <p:spPr>
           <a:xfrm>
-            <a:off x="566928" y="6252210"/>
-            <a:ext cx="1280160" cy="211709"/>
+            <a:off x="566928" y="6332448"/>
+            <a:ext cx="1280160" cy="239941"/>
           </a:xfrm>
           <a:prstGeom prst="rect">
             <a:avLst/>
@@ -9507,7 +9507,7 @@
         <p:spPr>
           <a:xfrm>
             <a:off x="566928" y="6455664"/>
-            <a:ext cx="11057839" cy="203454"/>
+            <a:ext cx="11057839" cy="230200"/>
           </a:xfrm>
           <a:prstGeom prst="rect">
             <a:avLst/>
@@ -9608,7 +9608,7 @@
         <p:spPr>
           <a:xfrm>
             <a:off x="566928" y="548640"/>
-            <a:ext cx="457200" cy="252984"/>
+            <a:ext cx="457200" cy="288645"/>
           </a:xfrm>
           <a:prstGeom prst="rect">
             <a:avLst/>
@@ -9647,7 +9647,7 @@
         <p:spPr>
           <a:xfrm>
             <a:off x="1097280" y="475488"/>
-            <a:ext cx="10509199" cy="211709"/>
+            <a:ext cx="10509199" cy="239941"/>
           </a:xfrm>
           <a:prstGeom prst="rect">
             <a:avLst/>
@@ -9686,7 +9686,7 @@
         <p:spPr>
           <a:xfrm>
             <a:off x="1097280" y="667512"/>
-            <a:ext cx="10509199" cy="414909"/>
+            <a:ext cx="10509199" cy="479717"/>
           </a:xfrm>
           <a:prstGeom prst="rect">
             <a:avLst/>
@@ -9815,7 +9815,7 @@
         <p:spPr>
           <a:xfrm>
             <a:off x="859536" y="1892808"/>
-            <a:ext cx="2905658" cy="298704"/>
+            <a:ext cx="2905658" cy="342595"/>
           </a:xfrm>
           <a:prstGeom prst="rect">
             <a:avLst/>
@@ -9854,7 +9854,7 @@
         <p:spPr>
           <a:xfrm>
             <a:off x="859536" y="2441448"/>
-            <a:ext cx="2905658" cy="1435989"/>
+            <a:ext cx="2905658" cy="1684591"/>
           </a:xfrm>
           <a:prstGeom prst="rect">
             <a:avLst/>
@@ -9983,7 +9983,7 @@
         <p:spPr>
           <a:xfrm>
             <a:off x="4643018" y="1892808"/>
-            <a:ext cx="2905658" cy="298704"/>
+            <a:ext cx="2905658" cy="342595"/>
           </a:xfrm>
           <a:prstGeom prst="rect">
             <a:avLst/>
@@ -10022,7 +10022,7 @@
         <p:spPr>
           <a:xfrm>
             <a:off x="4643018" y="2441448"/>
-            <a:ext cx="2905658" cy="1205801"/>
+            <a:ext cx="2905658" cy="1412970"/>
           </a:xfrm>
           <a:prstGeom prst="rect">
             <a:avLst/>
@@ -10151,7 +10151,7 @@
         <p:spPr>
           <a:xfrm>
             <a:off x="8426500" y="1892808"/>
-            <a:ext cx="2905658" cy="298704"/>
+            <a:ext cx="2905658" cy="342595"/>
           </a:xfrm>
           <a:prstGeom prst="rect">
             <a:avLst/>
@@ -10190,7 +10190,7 @@
         <p:spPr>
           <a:xfrm>
             <a:off x="8426500" y="2441448"/>
-            <a:ext cx="2905658" cy="1205801"/>
+            <a:ext cx="2905658" cy="1412970"/>
           </a:xfrm>
           <a:prstGeom prst="rect">
             <a:avLst/>
@@ -10317,7 +10317,7 @@
         <p:spPr>
           <a:xfrm>
             <a:off x="877824" y="4453128"/>
-            <a:ext cx="10417759" cy="277749"/>
+            <a:ext cx="10417759" cy="317868"/>
           </a:xfrm>
           <a:prstGeom prst="rect">
             <a:avLst/>
@@ -10356,7 +10356,7 @@
         <p:spPr>
           <a:xfrm>
             <a:off x="877824" y="4754880"/>
-            <a:ext cx="10417759" cy="694944"/>
+            <a:ext cx="10417759" cy="810158"/>
           </a:xfrm>
           <a:prstGeom prst="rect">
             <a:avLst/>
@@ -10395,7 +10395,7 @@
         <p:spPr>
           <a:xfrm>
             <a:off x="566928" y="6455664"/>
-            <a:ext cx="11057839" cy="203454"/>
+            <a:ext cx="11057839" cy="230200"/>
           </a:xfrm>
           <a:prstGeom prst="rect">
             <a:avLst/>
@@ -10496,7 +10496,7 @@
         <p:spPr>
           <a:xfrm>
             <a:off x="566928" y="475488"/>
-            <a:ext cx="10509199" cy="211709"/>
+            <a:ext cx="10509199" cy="239941"/>
           </a:xfrm>
           <a:prstGeom prst="rect">
             <a:avLst/>
@@ -10535,7 +10535,7 @@
         <p:spPr>
           <a:xfrm>
             <a:off x="566928" y="667512"/>
-            <a:ext cx="10509199" cy="414909"/>
+            <a:ext cx="10509199" cy="479717"/>
           </a:xfrm>
           <a:prstGeom prst="rect">
             <a:avLst/>
@@ -10664,7 +10664,7 @@
         <p:spPr>
           <a:xfrm>
             <a:off x="768096" y="1783080"/>
-            <a:ext cx="2288971" cy="368554"/>
+            <a:ext cx="2288971" cy="425018"/>
           </a:xfrm>
           <a:prstGeom prst="rect">
             <a:avLst/>
@@ -10703,7 +10703,7 @@
         <p:spPr>
           <a:xfrm>
             <a:off x="768096" y="2276856"/>
-            <a:ext cx="2288971" cy="449199"/>
+            <a:ext cx="2288971" cy="520179"/>
           </a:xfrm>
           <a:prstGeom prst="rect">
             <a:avLst/>
@@ -10832,7 +10832,7 @@
         <p:spPr>
           <a:xfrm>
             <a:off x="3569131" y="1783080"/>
-            <a:ext cx="2288971" cy="368554"/>
+            <a:ext cx="2288971" cy="425018"/>
           </a:xfrm>
           <a:prstGeom prst="rect">
             <a:avLst/>
@@ -10871,7 +10871,7 @@
         <p:spPr>
           <a:xfrm>
             <a:off x="3569131" y="2276856"/>
-            <a:ext cx="2288971" cy="449199"/>
+            <a:ext cx="2288971" cy="520179"/>
           </a:xfrm>
           <a:prstGeom prst="rect">
             <a:avLst/>
@@ -11000,7 +11000,7 @@
         <p:spPr>
           <a:xfrm>
             <a:off x="6370167" y="1783080"/>
-            <a:ext cx="2288971" cy="368554"/>
+            <a:ext cx="2288971" cy="425018"/>
           </a:xfrm>
           <a:prstGeom prst="rect">
             <a:avLst/>
@@ -11039,7 +11039,7 @@
         <p:spPr>
           <a:xfrm>
             <a:off x="6370167" y="2276856"/>
-            <a:ext cx="2288971" cy="449199"/>
+            <a:ext cx="2288971" cy="520179"/>
           </a:xfrm>
           <a:prstGeom prst="rect">
             <a:avLst/>
@@ -11168,7 +11168,7 @@
         <p:spPr>
           <a:xfrm>
             <a:off x="9171203" y="1783080"/>
-            <a:ext cx="2288971" cy="368554"/>
+            <a:ext cx="2288971" cy="425018"/>
           </a:xfrm>
           <a:prstGeom prst="rect">
             <a:avLst/>
@@ -11207,7 +11207,7 @@
         <p:spPr>
           <a:xfrm>
             <a:off x="9171203" y="2276856"/>
-            <a:ext cx="2288971" cy="449199"/>
+            <a:ext cx="2288971" cy="520179"/>
           </a:xfrm>
           <a:prstGeom prst="rect">
             <a:avLst/>
@@ -11246,7 +11246,7 @@
         <p:spPr>
           <a:xfrm>
             <a:off x="566928" y="3401568"/>
-            <a:ext cx="5486400" cy="211709"/>
+            <a:ext cx="5486400" cy="239941"/>
           </a:xfrm>
           <a:prstGeom prst="rect">
             <a:avLst/>
@@ -11285,7 +11285,7 @@
         <p:spPr>
           <a:xfrm>
             <a:off x="566928" y="3675887"/>
-            <a:ext cx="201168" cy="277749"/>
+            <a:ext cx="201168" cy="317868"/>
           </a:xfrm>
           <a:prstGeom prst="rect">
             <a:avLst/>
@@ -11324,7 +11324,7 @@
         <p:spPr>
           <a:xfrm>
             <a:off x="804672" y="3675887"/>
-            <a:ext cx="5157216" cy="277749"/>
+            <a:ext cx="5157216" cy="317868"/>
           </a:xfrm>
           <a:prstGeom prst="rect">
             <a:avLst/>
@@ -11371,8 +11371,8 @@
         </p:nvSpPr>
         <p:spPr>
           <a:xfrm>
-            <a:off x="566928" y="4136516"/>
-            <a:ext cx="201168" cy="277749"/>
+            <a:off x="566928" y="4176636"/>
+            <a:ext cx="201168" cy="317868"/>
           </a:xfrm>
           <a:prstGeom prst="rect">
             <a:avLst/>
@@ -11410,8 +11410,8 @@
         </p:nvSpPr>
         <p:spPr>
           <a:xfrm>
-            <a:off x="804672" y="4136516"/>
-            <a:ext cx="5157216" cy="277749"/>
+            <a:off x="804672" y="4176636"/>
+            <a:ext cx="5157216" cy="317868"/>
           </a:xfrm>
           <a:prstGeom prst="rect">
             <a:avLst/>
@@ -11458,8 +11458,8 @@
         </p:nvSpPr>
         <p:spPr>
           <a:xfrm>
-            <a:off x="566928" y="4597146"/>
-            <a:ext cx="201168" cy="277749"/>
+            <a:off x="566928" y="4677384"/>
+            <a:ext cx="201168" cy="317868"/>
           </a:xfrm>
           <a:prstGeom prst="rect">
             <a:avLst/>
@@ -11497,8 +11497,8 @@
         </p:nvSpPr>
         <p:spPr>
           <a:xfrm>
-            <a:off x="804672" y="4597146"/>
-            <a:ext cx="5157216" cy="500634"/>
+            <a:off x="804672" y="4677384"/>
+            <a:ext cx="5157216" cy="580872"/>
           </a:xfrm>
           <a:prstGeom prst="rect">
             <a:avLst/>
@@ -11545,8 +11545,8 @@
         </p:nvSpPr>
         <p:spPr>
           <a:xfrm>
-            <a:off x="566928" y="5280660"/>
-            <a:ext cx="201168" cy="277749"/>
+            <a:off x="566928" y="5441137"/>
+            <a:ext cx="201168" cy="317868"/>
           </a:xfrm>
           <a:prstGeom prst="rect">
             <a:avLst/>
@@ -11584,8 +11584,8 @@
         </p:nvSpPr>
         <p:spPr>
           <a:xfrm>
-            <a:off x="804672" y="5280660"/>
-            <a:ext cx="5157216" cy="277749"/>
+            <a:off x="804672" y="5441137"/>
+            <a:ext cx="5157216" cy="317868"/>
           </a:xfrm>
           <a:prstGeom prst="rect">
             <a:avLst/>
@@ -11633,7 +11633,7 @@
         <p:spPr>
           <a:xfrm>
             <a:off x="6876288" y="3401568"/>
-            <a:ext cx="5303520" cy="211709"/>
+            <a:ext cx="5303520" cy="239941"/>
           </a:xfrm>
           <a:prstGeom prst="rect">
             <a:avLst/>
@@ -11672,7 +11672,7 @@
         <p:spPr>
           <a:xfrm>
             <a:off x="6876288" y="3675887"/>
-            <a:ext cx="5257800" cy="517779"/>
+            <a:ext cx="5257800" cy="601103"/>
           </a:xfrm>
           <a:prstGeom prst="rect">
             <a:avLst/>
@@ -11710,8 +11710,8 @@
         </p:nvSpPr>
         <p:spPr>
           <a:xfrm>
-            <a:off x="6876288" y="4467987"/>
-            <a:ext cx="5257800" cy="1020063"/>
+            <a:off x="6876288" y="4551311"/>
+            <a:ext cx="5257800" cy="1160881"/>
           </a:xfrm>
           <a:prstGeom prst="rect">
             <a:avLst/>
@@ -11756,8 +11756,8 @@
         </p:nvSpPr>
         <p:spPr>
           <a:xfrm>
-            <a:off x="6876288" y="4467987"/>
-            <a:ext cx="21945" cy="1020063"/>
+            <a:off x="6876288" y="4551311"/>
+            <a:ext cx="21945" cy="1160881"/>
           </a:xfrm>
           <a:prstGeom prst="rect">
             <a:avLst/>
@@ -11800,8 +11800,8 @@
         </p:nvSpPr>
         <p:spPr>
           <a:xfrm>
-            <a:off x="7022592" y="4586858"/>
-            <a:ext cx="5020056" cy="800607"/>
+            <a:off x="7022592" y="4670183"/>
+            <a:ext cx="5020056" cy="941425"/>
           </a:xfrm>
           <a:prstGeom prst="rect">
             <a:avLst/>
@@ -11897,7 +11897,7 @@
         <p:spPr>
           <a:xfrm>
             <a:off x="566928" y="6455664"/>
-            <a:ext cx="11057839" cy="203454"/>
+            <a:ext cx="11057839" cy="230200"/>
           </a:xfrm>
           <a:prstGeom prst="rect">
             <a:avLst/>
@@ -11998,7 +11998,7 @@
         <p:spPr>
           <a:xfrm>
             <a:off x="566928" y="548640"/>
-            <a:ext cx="457200" cy="252984"/>
+            <a:ext cx="457200" cy="288645"/>
           </a:xfrm>
           <a:prstGeom prst="rect">
             <a:avLst/>
@@ -12037,7 +12037,7 @@
         <p:spPr>
           <a:xfrm>
             <a:off x="1097280" y="475488"/>
-            <a:ext cx="10509199" cy="211709"/>
+            <a:ext cx="10509199" cy="239941"/>
           </a:xfrm>
           <a:prstGeom prst="rect">
             <a:avLst/>
@@ -12076,7 +12076,7 @@
         <p:spPr>
           <a:xfrm>
             <a:off x="1097280" y="667512"/>
-            <a:ext cx="10509199" cy="414909"/>
+            <a:ext cx="10509199" cy="479717"/>
           </a:xfrm>
           <a:prstGeom prst="rect">
             <a:avLst/>
@@ -12115,7 +12115,7 @@
         <p:spPr>
           <a:xfrm>
             <a:off x="566928" y="1344168"/>
-            <a:ext cx="11057839" cy="500634"/>
+            <a:ext cx="11057839" cy="580872"/>
           </a:xfrm>
           <a:prstGeom prst="rect">
             <a:avLst/>
@@ -12153,8 +12153,8 @@
         </p:nvSpPr>
         <p:spPr>
           <a:xfrm>
-            <a:off x="566928" y="2045969"/>
-            <a:ext cx="6309360" cy="211709"/>
+            <a:off x="566928" y="2126208"/>
+            <a:ext cx="6309360" cy="239941"/>
           </a:xfrm>
           <a:prstGeom prst="rect">
             <a:avLst/>
@@ -12192,7 +12192,7 @@
         </p:nvSpPr>
         <p:spPr>
           <a:xfrm>
-            <a:off x="566928" y="2347721"/>
+            <a:off x="566928" y="2427960"/>
             <a:ext cx="256032" cy="256032"/>
           </a:xfrm>
           <a:prstGeom prst="rect">
@@ -12245,8 +12245,8 @@
         </p:nvSpPr>
         <p:spPr>
           <a:xfrm>
-            <a:off x="987552" y="2320289"/>
-            <a:ext cx="5852160" cy="286004"/>
+            <a:off x="987552" y="2400528"/>
+            <a:ext cx="5852160" cy="327609"/>
           </a:xfrm>
           <a:prstGeom prst="rect">
             <a:avLst/>
@@ -12284,8 +12284,8 @@
         </p:nvSpPr>
         <p:spPr>
           <a:xfrm>
-            <a:off x="987552" y="2594609"/>
-            <a:ext cx="5852160" cy="672084"/>
+            <a:off x="987552" y="2674848"/>
+            <a:ext cx="5852160" cy="783183"/>
           </a:xfrm>
           <a:prstGeom prst="rect">
             <a:avLst/>
@@ -12323,7 +12323,7 @@
         </p:nvSpPr>
         <p:spPr>
           <a:xfrm>
-            <a:off x="566928" y="3330701"/>
+            <a:off x="566928" y="3522040"/>
             <a:ext cx="6172200" cy="8229"/>
           </a:xfrm>
           <a:prstGeom prst="rect">
@@ -12367,7 +12367,7 @@
         </p:nvSpPr>
         <p:spPr>
           <a:xfrm>
-            <a:off x="566928" y="3495293"/>
+            <a:off x="566928" y="3686632"/>
             <a:ext cx="256032" cy="256032"/>
           </a:xfrm>
           <a:prstGeom prst="rect">
@@ -12420,8 +12420,8 @@
         </p:nvSpPr>
         <p:spPr>
           <a:xfrm>
-            <a:off x="987552" y="3467861"/>
-            <a:ext cx="5852160" cy="286004"/>
+            <a:off x="987552" y="3659200"/>
+            <a:ext cx="5852160" cy="327609"/>
           </a:xfrm>
           <a:prstGeom prst="rect">
             <a:avLst/>
@@ -12459,8 +12459,8 @@
         </p:nvSpPr>
         <p:spPr>
           <a:xfrm>
-            <a:off x="987552" y="3742181"/>
-            <a:ext cx="5852160" cy="672084"/>
+            <a:off x="987552" y="3933520"/>
+            <a:ext cx="5852160" cy="783183"/>
           </a:xfrm>
           <a:prstGeom prst="rect">
             <a:avLst/>
@@ -12498,7 +12498,7 @@
         </p:nvSpPr>
         <p:spPr>
           <a:xfrm>
-            <a:off x="566928" y="4478274"/>
+            <a:off x="566928" y="4780711"/>
             <a:ext cx="6172200" cy="8229"/>
           </a:xfrm>
           <a:prstGeom prst="rect">
@@ -12542,7 +12542,7 @@
         </p:nvSpPr>
         <p:spPr>
           <a:xfrm>
-            <a:off x="566928" y="4642866"/>
+            <a:off x="566928" y="4945303"/>
             <a:ext cx="256032" cy="256032"/>
           </a:xfrm>
           <a:prstGeom prst="rect">
@@ -12595,8 +12595,8 @@
         </p:nvSpPr>
         <p:spPr>
           <a:xfrm>
-            <a:off x="987552" y="4615433"/>
-            <a:ext cx="5852160" cy="286004"/>
+            <a:off x="987552" y="4917871"/>
+            <a:ext cx="5852160" cy="327609"/>
           </a:xfrm>
           <a:prstGeom prst="rect">
             <a:avLst/>
@@ -12634,8 +12634,8 @@
         </p:nvSpPr>
         <p:spPr>
           <a:xfrm>
-            <a:off x="987552" y="4889753"/>
-            <a:ext cx="5852160" cy="672084"/>
+            <a:off x="987552" y="5192191"/>
+            <a:ext cx="5852160" cy="783183"/>
           </a:xfrm>
           <a:prstGeom prst="rect">
             <a:avLst/>
@@ -12673,8 +12673,8 @@
         </p:nvSpPr>
         <p:spPr>
           <a:xfrm>
-            <a:off x="7242048" y="2045969"/>
-            <a:ext cx="4382719" cy="211709"/>
+            <a:off x="7242048" y="2126208"/>
+            <a:ext cx="4382719" cy="239941"/>
           </a:xfrm>
           <a:prstGeom prst="rect">
             <a:avLst/>
@@ -12712,8 +12712,8 @@
         </p:nvSpPr>
         <p:spPr>
           <a:xfrm>
-            <a:off x="7242048" y="2320289"/>
-            <a:ext cx="4382719" cy="2726944"/>
+            <a:off x="7242048" y="2400528"/>
+            <a:ext cx="4382719" cy="3175000"/>
           </a:xfrm>
           <a:prstGeom prst="rect">
             <a:avLst/>
@@ -12758,8 +12758,8 @@
         </p:nvSpPr>
         <p:spPr>
           <a:xfrm>
-            <a:off x="7242048" y="2320289"/>
-            <a:ext cx="21945" cy="2726944"/>
+            <a:off x="7242048" y="2400528"/>
+            <a:ext cx="21945" cy="3175000"/>
           </a:xfrm>
           <a:prstGeom prst="rect">
             <a:avLst/>
@@ -12802,8 +12802,8 @@
         </p:nvSpPr>
         <p:spPr>
           <a:xfrm>
-            <a:off x="7388352" y="2439161"/>
-            <a:ext cx="4144975" cy="2507487"/>
+            <a:off x="7388352" y="2519400"/>
+            <a:ext cx="4144975" cy="2955544"/>
           </a:xfrm>
           <a:prstGeom prst="rect">
             <a:avLst/>
@@ -13085,8 +13085,8 @@
         </p:nvSpPr>
         <p:spPr>
           <a:xfrm>
-            <a:off x="7242048" y="5284977"/>
-            <a:ext cx="20116" cy="413766"/>
+            <a:off x="7242048" y="5813272"/>
+            <a:ext cx="20116" cy="481660"/>
           </a:xfrm>
           <a:prstGeom prst="rect">
             <a:avLst/>
@@ -13129,8 +13129,8 @@
         </p:nvSpPr>
         <p:spPr>
           <a:xfrm>
-            <a:off x="7406640" y="5284977"/>
-            <a:ext cx="4218127" cy="432054"/>
+            <a:off x="7406640" y="5813272"/>
+            <a:ext cx="4218127" cy="499948"/>
           </a:xfrm>
           <a:prstGeom prst="rect">
             <a:avLst/>
@@ -13169,7 +13169,7 @@
         <p:spPr>
           <a:xfrm>
             <a:off x="566928" y="6455664"/>
-            <a:ext cx="11057839" cy="203454"/>
+            <a:ext cx="11057839" cy="230200"/>
           </a:xfrm>
           <a:prstGeom prst="rect">
             <a:avLst/>
@@ -13270,7 +13270,7 @@
         <p:spPr>
           <a:xfrm>
             <a:off x="566928" y="548640"/>
-            <a:ext cx="457200" cy="252984"/>
+            <a:ext cx="457200" cy="288645"/>
           </a:xfrm>
           <a:prstGeom prst="rect">
             <a:avLst/>
@@ -13309,7 +13309,7 @@
         <p:spPr>
           <a:xfrm>
             <a:off x="1097280" y="475488"/>
-            <a:ext cx="10509199" cy="211709"/>
+            <a:ext cx="10509199" cy="239941"/>
           </a:xfrm>
           <a:prstGeom prst="rect">
             <a:avLst/>
@@ -13348,7 +13348,7 @@
         <p:spPr>
           <a:xfrm>
             <a:off x="1097280" y="667512"/>
-            <a:ext cx="10509199" cy="414909"/>
+            <a:ext cx="10509199" cy="479717"/>
           </a:xfrm>
           <a:prstGeom prst="rect">
             <a:avLst/>
@@ -13387,7 +13387,7 @@
         <p:spPr>
           <a:xfrm>
             <a:off x="566928" y="1344168"/>
-            <a:ext cx="11057839" cy="277749"/>
+            <a:ext cx="11057839" cy="317868"/>
           </a:xfrm>
           <a:prstGeom prst="rect">
             <a:avLst/>
@@ -13425,8 +13425,8 @@
         </p:nvSpPr>
         <p:spPr>
           <a:xfrm>
-            <a:off x="566928" y="1914525"/>
-            <a:ext cx="2242108" cy="195199"/>
+            <a:off x="566928" y="1954644"/>
+            <a:ext cx="2242108" cy="220459"/>
           </a:xfrm>
           <a:prstGeom prst="rect">
             <a:avLst/>
@@ -13464,8 +13464,8 @@
         </p:nvSpPr>
         <p:spPr>
           <a:xfrm>
-            <a:off x="2900476" y="1914525"/>
-            <a:ext cx="1598371" cy="195199"/>
+            <a:off x="2900476" y="1954644"/>
+            <a:ext cx="1598371" cy="220459"/>
           </a:xfrm>
           <a:prstGeom prst="rect">
             <a:avLst/>
@@ -13503,8 +13503,8 @@
         </p:nvSpPr>
         <p:spPr>
           <a:xfrm>
-            <a:off x="4590288" y="1914525"/>
-            <a:ext cx="874166" cy="195199"/>
+            <a:off x="4590288" y="1954644"/>
+            <a:ext cx="874166" cy="220459"/>
           </a:xfrm>
           <a:prstGeom prst="rect">
             <a:avLst/>
@@ -13542,8 +13542,8 @@
         </p:nvSpPr>
         <p:spPr>
           <a:xfrm>
-            <a:off x="5555894" y="1914525"/>
-            <a:ext cx="874166" cy="195199"/>
+            <a:off x="5555894" y="1954644"/>
+            <a:ext cx="874166" cy="220459"/>
           </a:xfrm>
           <a:prstGeom prst="rect">
             <a:avLst/>
@@ -13581,8 +13581,8 @@
         </p:nvSpPr>
         <p:spPr>
           <a:xfrm>
-            <a:off x="6521500" y="1914525"/>
-            <a:ext cx="632764" cy="195199"/>
+            <a:off x="6521500" y="1954644"/>
+            <a:ext cx="632764" cy="220459"/>
           </a:xfrm>
           <a:prstGeom prst="rect">
             <a:avLst/>
@@ -13620,8 +13620,8 @@
         </p:nvSpPr>
         <p:spPr>
           <a:xfrm>
-            <a:off x="7245705" y="1914525"/>
-            <a:ext cx="1276502" cy="195199"/>
+            <a:off x="7245705" y="1954644"/>
+            <a:ext cx="1276502" cy="220459"/>
           </a:xfrm>
           <a:prstGeom prst="rect">
             <a:avLst/>
@@ -13659,7 +13659,7 @@
         </p:nvSpPr>
         <p:spPr>
           <a:xfrm>
-            <a:off x="566928" y="2152269"/>
+            <a:off x="566928" y="2192388"/>
             <a:ext cx="8046720" cy="8229"/>
           </a:xfrm>
           <a:prstGeom prst="rect">
@@ -13703,8 +13703,8 @@
         </p:nvSpPr>
         <p:spPr>
           <a:xfrm>
-            <a:off x="566928" y="2243709"/>
-            <a:ext cx="2242108" cy="253301"/>
+            <a:off x="566928" y="2283828"/>
+            <a:ext cx="2242108" cy="289020"/>
           </a:xfrm>
           <a:prstGeom prst="rect">
             <a:avLst/>
@@ -13742,7 +13742,7 @@
         </p:nvSpPr>
         <p:spPr>
           <a:xfrm>
-            <a:off x="2900476" y="2261997"/>
+            <a:off x="2900476" y="2302116"/>
             <a:ext cx="788212" cy="201168"/>
           </a:xfrm>
           <a:prstGeom prst="rect">
@@ -13795,8 +13795,8 @@
         </p:nvSpPr>
         <p:spPr>
           <a:xfrm>
-            <a:off x="4590288" y="2243709"/>
-            <a:ext cx="874166" cy="253301"/>
+            <a:off x="4590288" y="2283828"/>
+            <a:ext cx="874166" cy="289020"/>
           </a:xfrm>
           <a:prstGeom prst="rect">
             <a:avLst/>
@@ -13834,8 +13834,8 @@
         </p:nvSpPr>
         <p:spPr>
           <a:xfrm>
-            <a:off x="5555894" y="2243709"/>
-            <a:ext cx="874166" cy="253301"/>
+            <a:off x="5555894" y="2283828"/>
+            <a:ext cx="874166" cy="289020"/>
           </a:xfrm>
           <a:prstGeom prst="rect">
             <a:avLst/>
@@ -13873,8 +13873,8 @@
         </p:nvSpPr>
         <p:spPr>
           <a:xfrm>
-            <a:off x="6521500" y="2243709"/>
-            <a:ext cx="632764" cy="253301"/>
+            <a:off x="6521500" y="2283828"/>
+            <a:ext cx="632764" cy="289020"/>
           </a:xfrm>
           <a:prstGeom prst="rect">
             <a:avLst/>
@@ -13912,7 +13912,7 @@
         </p:nvSpPr>
         <p:spPr>
           <a:xfrm>
-            <a:off x="7245705" y="2261997"/>
+            <a:off x="7245705" y="2302116"/>
             <a:ext cx="574243" cy="201168"/>
           </a:xfrm>
           <a:prstGeom prst="rect">
@@ -13965,7 +13965,7 @@
         </p:nvSpPr>
         <p:spPr>
           <a:xfrm>
-            <a:off x="566928" y="2554604"/>
+            <a:off x="566928" y="2609424"/>
             <a:ext cx="8046720" cy="8229"/>
           </a:xfrm>
           <a:prstGeom prst="rect">
@@ -14009,8 +14009,8 @@
         </p:nvSpPr>
         <p:spPr>
           <a:xfrm>
-            <a:off x="566928" y="2646045"/>
-            <a:ext cx="2242108" cy="253301"/>
+            <a:off x="566928" y="2700864"/>
+            <a:ext cx="2242108" cy="289020"/>
           </a:xfrm>
           <a:prstGeom prst="rect">
             <a:avLst/>
@@ -14048,7 +14048,7 @@
         </p:nvSpPr>
         <p:spPr>
           <a:xfrm>
-            <a:off x="2900476" y="2664333"/>
+            <a:off x="2900476" y="2719152"/>
             <a:ext cx="788212" cy="201168"/>
           </a:xfrm>
           <a:prstGeom prst="rect">
@@ -14101,8 +14101,8 @@
         </p:nvSpPr>
         <p:spPr>
           <a:xfrm>
-            <a:off x="4590288" y="2646045"/>
-            <a:ext cx="874166" cy="253301"/>
+            <a:off x="4590288" y="2700864"/>
+            <a:ext cx="874166" cy="289020"/>
           </a:xfrm>
           <a:prstGeom prst="rect">
             <a:avLst/>
@@ -14140,8 +14140,8 @@
         </p:nvSpPr>
         <p:spPr>
           <a:xfrm>
-            <a:off x="5555894" y="2646045"/>
-            <a:ext cx="874166" cy="253301"/>
+            <a:off x="5555894" y="2700864"/>
+            <a:ext cx="874166" cy="289020"/>
           </a:xfrm>
           <a:prstGeom prst="rect">
             <a:avLst/>
@@ -14179,8 +14179,8 @@
         </p:nvSpPr>
         <p:spPr>
           <a:xfrm>
-            <a:off x="6521500" y="2646045"/>
-            <a:ext cx="632764" cy="253301"/>
+            <a:off x="6521500" y="2700864"/>
+            <a:ext cx="632764" cy="289020"/>
           </a:xfrm>
           <a:prstGeom prst="rect">
             <a:avLst/>
@@ -14218,7 +14218,7 @@
         </p:nvSpPr>
         <p:spPr>
           <a:xfrm>
-            <a:off x="7245705" y="2664333"/>
+            <a:off x="7245705" y="2719152"/>
             <a:ext cx="574243" cy="201168"/>
           </a:xfrm>
           <a:prstGeom prst="rect">
@@ -14271,7 +14271,7 @@
         </p:nvSpPr>
         <p:spPr>
           <a:xfrm>
-            <a:off x="566928" y="2956940"/>
+            <a:off x="566928" y="3026460"/>
             <a:ext cx="8046720" cy="8229"/>
           </a:xfrm>
           <a:prstGeom prst="rect">
@@ -14315,8 +14315,8 @@
         </p:nvSpPr>
         <p:spPr>
           <a:xfrm>
-            <a:off x="566928" y="3048381"/>
-            <a:ext cx="2242108" cy="253301"/>
+            <a:off x="566928" y="3117900"/>
+            <a:ext cx="2242108" cy="289020"/>
           </a:xfrm>
           <a:prstGeom prst="rect">
             <a:avLst/>
@@ -14354,7 +14354,7 @@
         </p:nvSpPr>
         <p:spPr>
           <a:xfrm>
-            <a:off x="2900476" y="3066669"/>
+            <a:off x="2900476" y="3136188"/>
             <a:ext cx="574243" cy="201168"/>
           </a:xfrm>
           <a:prstGeom prst="rect">
@@ -14407,8 +14407,8 @@
         </p:nvSpPr>
         <p:spPr>
           <a:xfrm>
-            <a:off x="4590288" y="3048381"/>
-            <a:ext cx="874166" cy="253301"/>
+            <a:off x="4590288" y="3117900"/>
+            <a:ext cx="874166" cy="289020"/>
           </a:xfrm>
           <a:prstGeom prst="rect">
             <a:avLst/>
@@ -14446,8 +14446,8 @@
         </p:nvSpPr>
         <p:spPr>
           <a:xfrm>
-            <a:off x="5555894" y="3048381"/>
-            <a:ext cx="874166" cy="253301"/>
+            <a:off x="5555894" y="3117900"/>
+            <a:ext cx="874166" cy="289020"/>
           </a:xfrm>
           <a:prstGeom prst="rect">
             <a:avLst/>
@@ -14485,8 +14485,8 @@
         </p:nvSpPr>
         <p:spPr>
           <a:xfrm>
-            <a:off x="6521500" y="3048381"/>
-            <a:ext cx="632764" cy="253301"/>
+            <a:off x="6521500" y="3117900"/>
+            <a:ext cx="632764" cy="289020"/>
           </a:xfrm>
           <a:prstGeom prst="rect">
             <a:avLst/>
@@ -14524,7 +14524,7 @@
         </p:nvSpPr>
         <p:spPr>
           <a:xfrm>
-            <a:off x="7245705" y="3066669"/>
+            <a:off x="7245705" y="3136188"/>
             <a:ext cx="645566" cy="201168"/>
           </a:xfrm>
           <a:prstGeom prst="rect">
@@ -14577,7 +14577,7 @@
         </p:nvSpPr>
         <p:spPr>
           <a:xfrm>
-            <a:off x="566928" y="3359276"/>
+            <a:off x="566928" y="3443497"/>
             <a:ext cx="8046720" cy="8229"/>
           </a:xfrm>
           <a:prstGeom prst="rect">
@@ -14621,8 +14621,8 @@
         </p:nvSpPr>
         <p:spPr>
           <a:xfrm>
-            <a:off x="566928" y="3450716"/>
-            <a:ext cx="2242108" cy="253301"/>
+            <a:off x="566928" y="3534937"/>
+            <a:ext cx="2242108" cy="289020"/>
           </a:xfrm>
           <a:prstGeom prst="rect">
             <a:avLst/>
@@ -14660,7 +14660,7 @@
         </p:nvSpPr>
         <p:spPr>
           <a:xfrm>
-            <a:off x="2900476" y="3469004"/>
+            <a:off x="2900476" y="3553225"/>
             <a:ext cx="574243" cy="201168"/>
           </a:xfrm>
           <a:prstGeom prst="rect">
@@ -14713,8 +14713,8 @@
         </p:nvSpPr>
         <p:spPr>
           <a:xfrm>
-            <a:off x="4590288" y="3450716"/>
-            <a:ext cx="874166" cy="253301"/>
+            <a:off x="4590288" y="3534937"/>
+            <a:ext cx="874166" cy="289020"/>
           </a:xfrm>
           <a:prstGeom prst="rect">
             <a:avLst/>
@@ -14752,8 +14752,8 @@
         </p:nvSpPr>
         <p:spPr>
           <a:xfrm>
-            <a:off x="5555894" y="3450716"/>
-            <a:ext cx="874166" cy="253301"/>
+            <a:off x="5555894" y="3534937"/>
+            <a:ext cx="874166" cy="289020"/>
           </a:xfrm>
           <a:prstGeom prst="rect">
             <a:avLst/>
@@ -14791,8 +14791,8 @@
         </p:nvSpPr>
         <p:spPr>
           <a:xfrm>
-            <a:off x="6521500" y="3450716"/>
-            <a:ext cx="632764" cy="253301"/>
+            <a:off x="6521500" y="3534937"/>
+            <a:ext cx="632764" cy="289020"/>
           </a:xfrm>
           <a:prstGeom prst="rect">
             <a:avLst/>
@@ -14830,7 +14830,7 @@
         </p:nvSpPr>
         <p:spPr>
           <a:xfrm>
-            <a:off x="7245705" y="3469004"/>
+            <a:off x="7245705" y="3553225"/>
             <a:ext cx="645566" cy="201168"/>
           </a:xfrm>
           <a:prstGeom prst="rect">
@@ -14883,7 +14883,7 @@
         </p:nvSpPr>
         <p:spPr>
           <a:xfrm>
-            <a:off x="566928" y="3761613"/>
+            <a:off x="566928" y="3860533"/>
             <a:ext cx="8046720" cy="8229"/>
           </a:xfrm>
           <a:prstGeom prst="rect">
@@ -14927,8 +14927,8 @@
         </p:nvSpPr>
         <p:spPr>
           <a:xfrm>
-            <a:off x="566928" y="3853053"/>
-            <a:ext cx="2242108" cy="253301"/>
+            <a:off x="566928" y="3951973"/>
+            <a:ext cx="2242108" cy="289020"/>
           </a:xfrm>
           <a:prstGeom prst="rect">
             <a:avLst/>
@@ -14966,7 +14966,7 @@
         </p:nvSpPr>
         <p:spPr>
           <a:xfrm>
-            <a:off x="2900476" y="3871340"/>
+            <a:off x="2900476" y="3970261"/>
             <a:ext cx="574243" cy="201168"/>
           </a:xfrm>
           <a:prstGeom prst="rect">
@@ -15019,8 +15019,8 @@
         </p:nvSpPr>
         <p:spPr>
           <a:xfrm>
-            <a:off x="4590288" y="3853053"/>
-            <a:ext cx="874166" cy="253301"/>
+            <a:off x="4590288" y="3951973"/>
+            <a:ext cx="874166" cy="289020"/>
           </a:xfrm>
           <a:prstGeom prst="rect">
             <a:avLst/>
@@ -15058,8 +15058,8 @@
         </p:nvSpPr>
         <p:spPr>
           <a:xfrm>
-            <a:off x="5555894" y="3853053"/>
-            <a:ext cx="874166" cy="253301"/>
+            <a:off x="5555894" y="3951973"/>
+            <a:ext cx="874166" cy="289020"/>
           </a:xfrm>
           <a:prstGeom prst="rect">
             <a:avLst/>
@@ -15097,8 +15097,8 @@
         </p:nvSpPr>
         <p:spPr>
           <a:xfrm>
-            <a:off x="6521500" y="3853053"/>
-            <a:ext cx="632764" cy="253301"/>
+            <a:off x="6521500" y="3951973"/>
+            <a:ext cx="632764" cy="289020"/>
           </a:xfrm>
           <a:prstGeom prst="rect">
             <a:avLst/>
@@ -15136,7 +15136,7 @@
         </p:nvSpPr>
         <p:spPr>
           <a:xfrm>
-            <a:off x="7245705" y="3871340"/>
+            <a:off x="7245705" y="3970261"/>
             <a:ext cx="645566" cy="201168"/>
           </a:xfrm>
           <a:prstGeom prst="rect">
@@ -15189,7 +15189,7 @@
         </p:nvSpPr>
         <p:spPr>
           <a:xfrm>
-            <a:off x="566928" y="4163949"/>
+            <a:off x="566928" y="4277569"/>
             <a:ext cx="8046720" cy="8229"/>
           </a:xfrm>
           <a:prstGeom prst="rect">
@@ -15233,8 +15233,8 @@
         </p:nvSpPr>
         <p:spPr>
           <a:xfrm>
-            <a:off x="566928" y="4255389"/>
-            <a:ext cx="2242108" cy="253301"/>
+            <a:off x="566928" y="4369009"/>
+            <a:ext cx="2242108" cy="289020"/>
           </a:xfrm>
           <a:prstGeom prst="rect">
             <a:avLst/>
@@ -15272,7 +15272,7 @@
         </p:nvSpPr>
         <p:spPr>
           <a:xfrm>
-            <a:off x="2900476" y="4273677"/>
+            <a:off x="2900476" y="4387297"/>
             <a:ext cx="574243" cy="201168"/>
           </a:xfrm>
           <a:prstGeom prst="rect">
@@ -15325,8 +15325,8 @@
         </p:nvSpPr>
         <p:spPr>
           <a:xfrm>
-            <a:off x="4590288" y="4255389"/>
-            <a:ext cx="874166" cy="253301"/>
+            <a:off x="4590288" y="4369009"/>
+            <a:ext cx="874166" cy="289020"/>
           </a:xfrm>
           <a:prstGeom prst="rect">
             <a:avLst/>
@@ -15364,8 +15364,8 @@
         </p:nvSpPr>
         <p:spPr>
           <a:xfrm>
-            <a:off x="5555894" y="4255389"/>
-            <a:ext cx="874166" cy="253301"/>
+            <a:off x="5555894" y="4369009"/>
+            <a:ext cx="874166" cy="289020"/>
           </a:xfrm>
           <a:prstGeom prst="rect">
             <a:avLst/>
@@ -15403,8 +15403,8 @@
         </p:nvSpPr>
         <p:spPr>
           <a:xfrm>
-            <a:off x="6521500" y="4255389"/>
-            <a:ext cx="632764" cy="253301"/>
+            <a:off x="6521500" y="4369009"/>
+            <a:ext cx="632764" cy="289020"/>
           </a:xfrm>
           <a:prstGeom prst="rect">
             <a:avLst/>
@@ -15442,7 +15442,7 @@
         </p:nvSpPr>
         <p:spPr>
           <a:xfrm>
-            <a:off x="7245705" y="4273677"/>
+            <a:off x="7245705" y="4387297"/>
             <a:ext cx="645566" cy="201168"/>
           </a:xfrm>
           <a:prstGeom prst="rect">
@@ -15495,7 +15495,7 @@
         </p:nvSpPr>
         <p:spPr>
           <a:xfrm>
-            <a:off x="566928" y="4566285"/>
+            <a:off x="566928" y="4694605"/>
             <a:ext cx="8046720" cy="8229"/>
           </a:xfrm>
           <a:prstGeom prst="rect">
@@ -15539,8 +15539,8 @@
         </p:nvSpPr>
         <p:spPr>
           <a:xfrm>
-            <a:off x="566928" y="4657725"/>
-            <a:ext cx="2242108" cy="253301"/>
+            <a:off x="566928" y="4786045"/>
+            <a:ext cx="2242108" cy="289020"/>
           </a:xfrm>
           <a:prstGeom prst="rect">
             <a:avLst/>
@@ -15578,7 +15578,7 @@
         </p:nvSpPr>
         <p:spPr>
           <a:xfrm>
-            <a:off x="2900476" y="4676013"/>
+            <a:off x="2900476" y="4804333"/>
             <a:ext cx="788212" cy="201168"/>
           </a:xfrm>
           <a:prstGeom prst="rect">
@@ -15631,8 +15631,8 @@
         </p:nvSpPr>
         <p:spPr>
           <a:xfrm>
-            <a:off x="4590288" y="4657725"/>
-            <a:ext cx="874166" cy="253301"/>
+            <a:off x="4590288" y="4786045"/>
+            <a:ext cx="874166" cy="289020"/>
           </a:xfrm>
           <a:prstGeom prst="rect">
             <a:avLst/>
@@ -15670,8 +15670,8 @@
         </p:nvSpPr>
         <p:spPr>
           <a:xfrm>
-            <a:off x="5555894" y="4657725"/>
-            <a:ext cx="874166" cy="253301"/>
+            <a:off x="5555894" y="4786045"/>
+            <a:ext cx="874166" cy="289020"/>
           </a:xfrm>
           <a:prstGeom prst="rect">
             <a:avLst/>
@@ -15709,8 +15709,8 @@
         </p:nvSpPr>
         <p:spPr>
           <a:xfrm>
-            <a:off x="6521500" y="4657725"/>
-            <a:ext cx="632764" cy="253301"/>
+            <a:off x="6521500" y="4786045"/>
+            <a:ext cx="632764" cy="289020"/>
           </a:xfrm>
           <a:prstGeom prst="rect">
             <a:avLst/>
@@ -15748,7 +15748,7 @@
         </p:nvSpPr>
         <p:spPr>
           <a:xfrm>
-            <a:off x="7245705" y="4676013"/>
+            <a:off x="7245705" y="4804333"/>
             <a:ext cx="645566" cy="201168"/>
           </a:xfrm>
           <a:prstGeom prst="rect">
@@ -15801,7 +15801,7 @@
         </p:nvSpPr>
         <p:spPr>
           <a:xfrm>
-            <a:off x="566928" y="4968621"/>
+            <a:off x="566928" y="5111642"/>
             <a:ext cx="8046720" cy="8229"/>
           </a:xfrm>
           <a:prstGeom prst="rect">
@@ -15845,8 +15845,8 @@
         </p:nvSpPr>
         <p:spPr>
           <a:xfrm>
-            <a:off x="566928" y="5060061"/>
-            <a:ext cx="2242108" cy="253301"/>
+            <a:off x="566928" y="5203082"/>
+            <a:ext cx="2242108" cy="289020"/>
           </a:xfrm>
           <a:prstGeom prst="rect">
             <a:avLst/>
@@ -15884,7 +15884,7 @@
         </p:nvSpPr>
         <p:spPr>
           <a:xfrm>
-            <a:off x="2900476" y="5078349"/>
+            <a:off x="2900476" y="5221370"/>
             <a:ext cx="574243" cy="201168"/>
           </a:xfrm>
           <a:prstGeom prst="rect">
@@ -15937,8 +15937,8 @@
         </p:nvSpPr>
         <p:spPr>
           <a:xfrm>
-            <a:off x="4590288" y="5060061"/>
-            <a:ext cx="874166" cy="253301"/>
+            <a:off x="4590288" y="5203082"/>
+            <a:ext cx="874166" cy="289020"/>
           </a:xfrm>
           <a:prstGeom prst="rect">
             <a:avLst/>
@@ -15976,8 +15976,8 @@
         </p:nvSpPr>
         <p:spPr>
           <a:xfrm>
-            <a:off x="5555894" y="5060061"/>
-            <a:ext cx="874166" cy="253301"/>
+            <a:off x="5555894" y="5203082"/>
+            <a:ext cx="874166" cy="289020"/>
           </a:xfrm>
           <a:prstGeom prst="rect">
             <a:avLst/>
@@ -16015,8 +16015,8 @@
         </p:nvSpPr>
         <p:spPr>
           <a:xfrm>
-            <a:off x="6521500" y="5060061"/>
-            <a:ext cx="632764" cy="253301"/>
+            <a:off x="6521500" y="5203082"/>
+            <a:ext cx="632764" cy="289020"/>
           </a:xfrm>
           <a:prstGeom prst="rect">
             <a:avLst/>
@@ -16054,7 +16054,7 @@
         </p:nvSpPr>
         <p:spPr>
           <a:xfrm>
-            <a:off x="7245705" y="5078349"/>
+            <a:off x="7245705" y="5221370"/>
             <a:ext cx="288950" cy="201168"/>
           </a:xfrm>
           <a:prstGeom prst="rect">
@@ -16107,8 +16107,8 @@
         </p:nvSpPr>
         <p:spPr>
           <a:xfrm>
-            <a:off x="8979407" y="1914525"/>
-            <a:ext cx="3200400" cy="211709"/>
+            <a:off x="8979407" y="1954644"/>
+            <a:ext cx="3200400" cy="239941"/>
           </a:xfrm>
           <a:prstGeom prst="rect">
             <a:avLst/>
@@ -16146,8 +16146,8 @@
         </p:nvSpPr>
         <p:spPr>
           <a:xfrm>
-            <a:off x="8979407" y="2188845"/>
-            <a:ext cx="3154680" cy="748284"/>
+            <a:off x="8979407" y="2228964"/>
+            <a:ext cx="3154680" cy="873099"/>
           </a:xfrm>
           <a:prstGeom prst="rect">
             <a:avLst/>
@@ -16185,8 +16185,8 @@
         </p:nvSpPr>
         <p:spPr>
           <a:xfrm>
-            <a:off x="8979407" y="3193161"/>
-            <a:ext cx="3154680" cy="979424"/>
+            <a:off x="8979407" y="3358095"/>
+            <a:ext cx="3154680" cy="1145844"/>
           </a:xfrm>
           <a:prstGeom prst="rect">
             <a:avLst/>
@@ -16224,8 +16224,8 @@
         </p:nvSpPr>
         <p:spPr>
           <a:xfrm>
-            <a:off x="8979407" y="4538345"/>
-            <a:ext cx="20116" cy="602361"/>
+            <a:off x="8979407" y="4869700"/>
+            <a:ext cx="20116" cy="704202"/>
           </a:xfrm>
           <a:prstGeom prst="rect">
             <a:avLst/>
@@ -16268,8 +16268,8 @@
         </p:nvSpPr>
         <p:spPr>
           <a:xfrm>
-            <a:off x="9143999" y="4538345"/>
-            <a:ext cx="2990088" cy="620649"/>
+            <a:off x="9143999" y="4869700"/>
+            <a:ext cx="2990088" cy="722490"/>
           </a:xfrm>
           <a:prstGeom prst="rect">
             <a:avLst/>
@@ -16308,7 +16308,7 @@
         <p:spPr>
           <a:xfrm>
             <a:off x="566928" y="6455664"/>
-            <a:ext cx="11057839" cy="203454"/>
+            <a:ext cx="11057839" cy="230200"/>
           </a:xfrm>
           <a:prstGeom prst="rect">
             <a:avLst/>
@@ -16409,7 +16409,7 @@
         <p:spPr>
           <a:xfrm>
             <a:off x="566928" y="548640"/>
-            <a:ext cx="457200" cy="252984"/>
+            <a:ext cx="457200" cy="288645"/>
           </a:xfrm>
           <a:prstGeom prst="rect">
             <a:avLst/>
@@ -16448,7 +16448,7 @@
         <p:spPr>
           <a:xfrm>
             <a:off x="1097280" y="475488"/>
-            <a:ext cx="10509199" cy="211709"/>
+            <a:ext cx="10509199" cy="239941"/>
           </a:xfrm>
           <a:prstGeom prst="rect">
             <a:avLst/>
@@ -16487,7 +16487,7 @@
         <p:spPr>
           <a:xfrm>
             <a:off x="1097280" y="667512"/>
-            <a:ext cx="10509199" cy="414909"/>
+            <a:ext cx="10509199" cy="479717"/>
           </a:xfrm>
           <a:prstGeom prst="rect">
             <a:avLst/>
@@ -16526,7 +16526,7 @@
         <p:spPr>
           <a:xfrm>
             <a:off x="566928" y="1344168"/>
-            <a:ext cx="11057839" cy="723519"/>
+            <a:ext cx="11057839" cy="843876"/>
           </a:xfrm>
           <a:prstGeom prst="rect">
             <a:avLst/>
@@ -16564,8 +16564,8 @@
         </p:nvSpPr>
         <p:spPr>
           <a:xfrm>
-            <a:off x="566928" y="2268855"/>
-            <a:ext cx="3840480" cy="211709"/>
+            <a:off x="566928" y="2389212"/>
+            <a:ext cx="3840480" cy="239941"/>
           </a:xfrm>
           <a:prstGeom prst="rect">
             <a:avLst/>
@@ -16603,8 +16603,8 @@
         </p:nvSpPr>
         <p:spPr>
           <a:xfrm>
-            <a:off x="566928" y="2543175"/>
-            <a:ext cx="201168" cy="261239"/>
+            <a:off x="566928" y="2663532"/>
+            <a:ext cx="201168" cy="298386"/>
           </a:xfrm>
           <a:prstGeom prst="rect">
             <a:avLst/>
@@ -16642,8 +16642,8 @@
         </p:nvSpPr>
         <p:spPr>
           <a:xfrm>
-            <a:off x="804672" y="2543175"/>
-            <a:ext cx="3511296" cy="261239"/>
+            <a:off x="804672" y="2663532"/>
+            <a:ext cx="3511296" cy="298386"/>
           </a:xfrm>
           <a:prstGeom prst="rect">
             <a:avLst/>
@@ -16690,8 +16690,8 @@
         </p:nvSpPr>
         <p:spPr>
           <a:xfrm>
-            <a:off x="566928" y="2950718"/>
-            <a:ext cx="201168" cy="261239"/>
+            <a:off x="566928" y="3108223"/>
+            <a:ext cx="201168" cy="298386"/>
           </a:xfrm>
           <a:prstGeom prst="rect">
             <a:avLst/>
@@ -16729,8 +16729,8 @@
         </p:nvSpPr>
         <p:spPr>
           <a:xfrm>
-            <a:off x="804672" y="2950718"/>
-            <a:ext cx="3511296" cy="467614"/>
+            <a:off x="804672" y="3108223"/>
+            <a:ext cx="3511296" cy="541909"/>
           </a:xfrm>
           <a:prstGeom prst="rect">
             <a:avLst/>
@@ -16777,8 +16777,8 @@
         </p:nvSpPr>
         <p:spPr>
           <a:xfrm>
-            <a:off x="566928" y="3564636"/>
-            <a:ext cx="201168" cy="261239"/>
+            <a:off x="566928" y="3796436"/>
+            <a:ext cx="201168" cy="298386"/>
           </a:xfrm>
           <a:prstGeom prst="rect">
             <a:avLst/>
@@ -16816,8 +16816,8 @@
         </p:nvSpPr>
         <p:spPr>
           <a:xfrm>
-            <a:off x="804672" y="3564636"/>
-            <a:ext cx="3511296" cy="261239"/>
+            <a:off x="804672" y="3796436"/>
+            <a:ext cx="3511296" cy="298386"/>
           </a:xfrm>
           <a:prstGeom prst="rect">
             <a:avLst/>
@@ -16864,8 +16864,8 @@
         </p:nvSpPr>
         <p:spPr>
           <a:xfrm>
-            <a:off x="566928" y="3972179"/>
-            <a:ext cx="201168" cy="261239"/>
+            <a:off x="566928" y="4241126"/>
+            <a:ext cx="201168" cy="298386"/>
           </a:xfrm>
           <a:prstGeom prst="rect">
             <a:avLst/>
@@ -16903,8 +16903,8 @@
         </p:nvSpPr>
         <p:spPr>
           <a:xfrm>
-            <a:off x="804672" y="3972179"/>
-            <a:ext cx="3511296" cy="261239"/>
+            <a:off x="804672" y="4241126"/>
+            <a:ext cx="3511296" cy="298386"/>
           </a:xfrm>
           <a:prstGeom prst="rect">
             <a:avLst/>
@@ -16951,8 +16951,8 @@
         </p:nvSpPr>
         <p:spPr>
           <a:xfrm>
-            <a:off x="566928" y="4379722"/>
-            <a:ext cx="201168" cy="261239"/>
+            <a:off x="566928" y="4685817"/>
+            <a:ext cx="201168" cy="298386"/>
           </a:xfrm>
           <a:prstGeom prst="rect">
             <a:avLst/>
@@ -16990,8 +16990,8 @@
         </p:nvSpPr>
         <p:spPr>
           <a:xfrm>
-            <a:off x="804672" y="4379722"/>
-            <a:ext cx="3511296" cy="261239"/>
+            <a:off x="804672" y="4685817"/>
+            <a:ext cx="3511296" cy="298386"/>
           </a:xfrm>
           <a:prstGeom prst="rect">
             <a:avLst/>
@@ -17038,8 +17038,8 @@
         </p:nvSpPr>
         <p:spPr>
           <a:xfrm>
-            <a:off x="566928" y="4988433"/>
-            <a:ext cx="3840480" cy="211709"/>
+            <a:off x="566928" y="5331675"/>
+            <a:ext cx="3840480" cy="239941"/>
           </a:xfrm>
           <a:prstGeom prst="rect">
             <a:avLst/>
@@ -17077,8 +17077,8 @@
         </p:nvSpPr>
         <p:spPr>
           <a:xfrm>
-            <a:off x="566928" y="5262753"/>
-            <a:ext cx="3749039" cy="672084"/>
+            <a:off x="566928" y="5605995"/>
+            <a:ext cx="3749039" cy="783183"/>
           </a:xfrm>
           <a:prstGeom prst="rect">
             <a:avLst/>
@@ -17116,8 +17116,8 @@
         </p:nvSpPr>
         <p:spPr>
           <a:xfrm>
-            <a:off x="566928" y="6154293"/>
-            <a:ext cx="845819" cy="195199"/>
+            <a:off x="566928" y="6608635"/>
+            <a:ext cx="845819" cy="220459"/>
           </a:xfrm>
           <a:prstGeom prst="rect">
             <a:avLst/>
@@ -17155,8 +17155,8 @@
         </p:nvSpPr>
         <p:spPr>
           <a:xfrm>
-            <a:off x="1504188" y="6154293"/>
-            <a:ext cx="508406" cy="195199"/>
+            <a:off x="1504188" y="6608635"/>
+            <a:ext cx="508406" cy="220459"/>
           </a:xfrm>
           <a:prstGeom prst="rect">
             <a:avLst/>
@@ -17194,8 +17194,8 @@
         </p:nvSpPr>
         <p:spPr>
           <a:xfrm>
-            <a:off x="2104034" y="6154293"/>
-            <a:ext cx="508406" cy="195199"/>
+            <a:off x="2104034" y="6608635"/>
+            <a:ext cx="508406" cy="220459"/>
           </a:xfrm>
           <a:prstGeom prst="rect">
             <a:avLst/>
@@ -17233,8 +17233,8 @@
         </p:nvSpPr>
         <p:spPr>
           <a:xfrm>
-            <a:off x="2703880" y="6154293"/>
-            <a:ext cx="433425" cy="195199"/>
+            <a:off x="2703880" y="6608635"/>
+            <a:ext cx="433425" cy="220459"/>
           </a:xfrm>
           <a:prstGeom prst="rect">
             <a:avLst/>
@@ -17272,8 +17272,8 @@
         </p:nvSpPr>
         <p:spPr>
           <a:xfrm>
-            <a:off x="3228746" y="6154293"/>
-            <a:ext cx="995781" cy="195199"/>
+            <a:off x="3228746" y="6608635"/>
+            <a:ext cx="995781" cy="220459"/>
           </a:xfrm>
           <a:prstGeom prst="rect">
             <a:avLst/>
@@ -17311,7 +17311,7 @@
         </p:nvSpPr>
         <p:spPr>
           <a:xfrm>
-            <a:off x="566928" y="6392037"/>
+            <a:off x="566928" y="6846379"/>
             <a:ext cx="3749039" cy="8229"/>
           </a:xfrm>
           <a:prstGeom prst="rect">
@@ -17355,8 +17355,8 @@
         </p:nvSpPr>
         <p:spPr>
           <a:xfrm>
-            <a:off x="566928" y="6483476"/>
-            <a:ext cx="845819" cy="237426"/>
+            <a:off x="566928" y="6937819"/>
+            <a:ext cx="845819" cy="270287"/>
           </a:xfrm>
           <a:prstGeom prst="rect">
             <a:avLst/>
@@ -17394,8 +17394,8 @@
         </p:nvSpPr>
         <p:spPr>
           <a:xfrm>
-            <a:off x="1504188" y="6483476"/>
-            <a:ext cx="508406" cy="237426"/>
+            <a:off x="1504188" y="6937819"/>
+            <a:ext cx="508406" cy="270287"/>
           </a:xfrm>
           <a:prstGeom prst="rect">
             <a:avLst/>
@@ -17433,8 +17433,8 @@
         </p:nvSpPr>
         <p:spPr>
           <a:xfrm>
-            <a:off x="2104034" y="6483476"/>
-            <a:ext cx="508406" cy="237426"/>
+            <a:off x="2104034" y="6937819"/>
+            <a:ext cx="508406" cy="270287"/>
           </a:xfrm>
           <a:prstGeom prst="rect">
             <a:avLst/>
@@ -17472,8 +17472,8 @@
         </p:nvSpPr>
         <p:spPr>
           <a:xfrm>
-            <a:off x="2703880" y="6483476"/>
-            <a:ext cx="433425" cy="237426"/>
+            <a:off x="2703880" y="6937819"/>
+            <a:ext cx="433425" cy="270287"/>
           </a:xfrm>
           <a:prstGeom prst="rect">
             <a:avLst/>
@@ -17511,7 +17511,7 @@
         </p:nvSpPr>
         <p:spPr>
           <a:xfrm>
-            <a:off x="3228746" y="6501764"/>
+            <a:off x="3228746" y="6956107"/>
             <a:ext cx="716889" cy="201168"/>
           </a:xfrm>
           <a:prstGeom prst="rect">
@@ -17564,7 +17564,7 @@
         </p:nvSpPr>
         <p:spPr>
           <a:xfrm>
-            <a:off x="566928" y="6776085"/>
+            <a:off x="566928" y="7230427"/>
             <a:ext cx="3749039" cy="8229"/>
           </a:xfrm>
           <a:prstGeom prst="rect">
@@ -17608,8 +17608,8 @@
         </p:nvSpPr>
         <p:spPr>
           <a:xfrm>
-            <a:off x="566928" y="6849237"/>
-            <a:ext cx="845819" cy="237426"/>
+            <a:off x="566928" y="7303579"/>
+            <a:ext cx="845819" cy="270287"/>
           </a:xfrm>
           <a:prstGeom prst="rect">
             <a:avLst/>
@@ -17647,8 +17647,8 @@
         </p:nvSpPr>
         <p:spPr>
           <a:xfrm>
-            <a:off x="1504188" y="6849237"/>
-            <a:ext cx="508406" cy="237426"/>
+            <a:off x="1504188" y="7303579"/>
+            <a:ext cx="508406" cy="270287"/>
           </a:xfrm>
           <a:prstGeom prst="rect">
             <a:avLst/>
@@ -17686,8 +17686,8 @@
         </p:nvSpPr>
         <p:spPr>
           <a:xfrm>
-            <a:off x="2104034" y="6849237"/>
-            <a:ext cx="508406" cy="237426"/>
+            <a:off x="2104034" y="7303579"/>
+            <a:ext cx="508406" cy="270287"/>
           </a:xfrm>
           <a:prstGeom prst="rect">
             <a:avLst/>
@@ -17725,8 +17725,8 @@
         </p:nvSpPr>
         <p:spPr>
           <a:xfrm>
-            <a:off x="2703880" y="6849237"/>
-            <a:ext cx="433425" cy="237426"/>
+            <a:off x="2703880" y="7303579"/>
+            <a:ext cx="433425" cy="270287"/>
           </a:xfrm>
           <a:prstGeom prst="rect">
             <a:avLst/>
@@ -17764,7 +17764,7 @@
         </p:nvSpPr>
         <p:spPr>
           <a:xfrm>
-            <a:off x="3228746" y="6867524"/>
+            <a:off x="3228746" y="7321867"/>
             <a:ext cx="574243" cy="201168"/>
           </a:xfrm>
           <a:prstGeom prst="rect">
@@ -17817,7 +17817,7 @@
         </p:nvSpPr>
         <p:spPr>
           <a:xfrm>
-            <a:off x="566928" y="7141845"/>
+            <a:off x="566928" y="7596187"/>
             <a:ext cx="3749039" cy="8229"/>
           </a:xfrm>
           <a:prstGeom prst="rect">
@@ -17861,8 +17861,8 @@
         </p:nvSpPr>
         <p:spPr>
           <a:xfrm>
-            <a:off x="566928" y="7214997"/>
-            <a:ext cx="845819" cy="237426"/>
+            <a:off x="566928" y="7669339"/>
+            <a:ext cx="845819" cy="270287"/>
           </a:xfrm>
           <a:prstGeom prst="rect">
             <a:avLst/>
@@ -17900,8 +17900,8 @@
         </p:nvSpPr>
         <p:spPr>
           <a:xfrm>
-            <a:off x="1504188" y="7214997"/>
-            <a:ext cx="508406" cy="237426"/>
+            <a:off x="1504188" y="7669339"/>
+            <a:ext cx="508406" cy="270287"/>
           </a:xfrm>
           <a:prstGeom prst="rect">
             <a:avLst/>
@@ -17939,8 +17939,8 @@
         </p:nvSpPr>
         <p:spPr>
           <a:xfrm>
-            <a:off x="2104034" y="7214997"/>
-            <a:ext cx="508406" cy="237426"/>
+            <a:off x="2104034" y="7669339"/>
+            <a:ext cx="508406" cy="270287"/>
           </a:xfrm>
           <a:prstGeom prst="rect">
             <a:avLst/>
@@ -17978,8 +17978,8 @@
         </p:nvSpPr>
         <p:spPr>
           <a:xfrm>
-            <a:off x="2703880" y="7214997"/>
-            <a:ext cx="433425" cy="237426"/>
+            <a:off x="2703880" y="7669339"/>
+            <a:ext cx="433425" cy="270287"/>
           </a:xfrm>
           <a:prstGeom prst="rect">
             <a:avLst/>
@@ -18017,7 +18017,7 @@
         </p:nvSpPr>
         <p:spPr>
           <a:xfrm>
-            <a:off x="3228746" y="7233285"/>
+            <a:off x="3228746" y="7687627"/>
             <a:ext cx="716889" cy="201168"/>
           </a:xfrm>
           <a:prstGeom prst="rect">
@@ -18070,8 +18070,8 @@
         </p:nvSpPr>
         <p:spPr>
           <a:xfrm>
-            <a:off x="4727448" y="2268855"/>
-            <a:ext cx="4297680" cy="211709"/>
+            <a:off x="4727448" y="2389212"/>
+            <a:ext cx="4297680" cy="239941"/>
           </a:xfrm>
           <a:prstGeom prst="rect">
             <a:avLst/>
@@ -18109,8 +18109,8 @@
         </p:nvSpPr>
         <p:spPr>
           <a:xfrm>
-            <a:off x="4727448" y="2570607"/>
-            <a:ext cx="1371600" cy="244728"/>
+            <a:off x="4727448" y="2690964"/>
+            <a:ext cx="1371600" cy="278904"/>
           </a:xfrm>
           <a:prstGeom prst="rect">
             <a:avLst/>
@@ -18148,7 +18148,7 @@
         </p:nvSpPr>
         <p:spPr>
           <a:xfrm>
-            <a:off x="6190488" y="2543175"/>
+            <a:off x="6190488" y="2663532"/>
             <a:ext cx="2075687" cy="184343"/>
           </a:xfrm>
           <a:prstGeom prst="rect">
@@ -18192,7 +18192,7 @@
         </p:nvSpPr>
         <p:spPr>
           <a:xfrm>
-            <a:off x="6190488" y="2543175"/>
+            <a:off x="6190488" y="2663532"/>
             <a:ext cx="2075687" cy="184343"/>
           </a:xfrm>
           <a:prstGeom prst="rect">
@@ -18236,8 +18236,8 @@
         </p:nvSpPr>
         <p:spPr>
           <a:xfrm>
-            <a:off x="8357615" y="2570607"/>
-            <a:ext cx="502920" cy="244728"/>
+            <a:off x="8357615" y="2690964"/>
+            <a:ext cx="502920" cy="278904"/>
           </a:xfrm>
           <a:prstGeom prst="rect">
             <a:avLst/>
@@ -18275,8 +18275,8 @@
         </p:nvSpPr>
         <p:spPr>
           <a:xfrm>
-            <a:off x="4727448" y="2927223"/>
-            <a:ext cx="1371600" cy="244728"/>
+            <a:off x="4727448" y="3047580"/>
+            <a:ext cx="1371600" cy="278904"/>
           </a:xfrm>
           <a:prstGeom prst="rect">
             <a:avLst/>
@@ -18314,7 +18314,7 @@
         </p:nvSpPr>
         <p:spPr>
           <a:xfrm>
-            <a:off x="6190488" y="2899791"/>
+            <a:off x="6190488" y="3020148"/>
             <a:ext cx="2075687" cy="184343"/>
           </a:xfrm>
           <a:prstGeom prst="rect">
@@ -18358,7 +18358,7 @@
         </p:nvSpPr>
         <p:spPr>
           <a:xfrm>
-            <a:off x="6190488" y="2899791"/>
+            <a:off x="6190488" y="3020148"/>
             <a:ext cx="1619036" cy="184343"/>
           </a:xfrm>
           <a:prstGeom prst="rect">
@@ -18402,8 +18402,8 @@
         </p:nvSpPr>
         <p:spPr>
           <a:xfrm>
-            <a:off x="8357615" y="2927223"/>
-            <a:ext cx="502920" cy="244728"/>
+            <a:off x="8357615" y="3047580"/>
+            <a:ext cx="502920" cy="278904"/>
           </a:xfrm>
           <a:prstGeom prst="rect">
             <a:avLst/>
@@ -18441,8 +18441,8 @@
         </p:nvSpPr>
         <p:spPr>
           <a:xfrm>
-            <a:off x="4727448" y="3283839"/>
-            <a:ext cx="1371600" cy="244728"/>
+            <a:off x="4727448" y="3404196"/>
+            <a:ext cx="1371600" cy="278904"/>
           </a:xfrm>
           <a:prstGeom prst="rect">
             <a:avLst/>
@@ -18480,7 +18480,7 @@
         </p:nvSpPr>
         <p:spPr>
           <a:xfrm>
-            <a:off x="6190488" y="3256407"/>
+            <a:off x="6190488" y="3376764"/>
             <a:ext cx="2075687" cy="184343"/>
           </a:xfrm>
           <a:prstGeom prst="rect">
@@ -18524,7 +18524,7 @@
         </p:nvSpPr>
         <p:spPr>
           <a:xfrm>
-            <a:off x="6190488" y="3256407"/>
+            <a:off x="6190488" y="3376764"/>
             <a:ext cx="1432224" cy="184343"/>
           </a:xfrm>
           <a:prstGeom prst="rect">
@@ -18568,8 +18568,8 @@
         </p:nvSpPr>
         <p:spPr>
           <a:xfrm>
-            <a:off x="8357615" y="3283839"/>
-            <a:ext cx="502920" cy="244728"/>
+            <a:off x="8357615" y="3404196"/>
+            <a:ext cx="502920" cy="278904"/>
           </a:xfrm>
           <a:prstGeom prst="rect">
             <a:avLst/>
@@ -18607,8 +18607,8 @@
         </p:nvSpPr>
         <p:spPr>
           <a:xfrm>
-            <a:off x="4727448" y="3640454"/>
-            <a:ext cx="1371600" cy="244728"/>
+            <a:off x="4727448" y="3760812"/>
+            <a:ext cx="1371600" cy="278904"/>
           </a:xfrm>
           <a:prstGeom prst="rect">
             <a:avLst/>
@@ -18646,7 +18646,7 @@
         </p:nvSpPr>
         <p:spPr>
           <a:xfrm>
-            <a:off x="6190488" y="3613023"/>
+            <a:off x="6190488" y="3733380"/>
             <a:ext cx="2075687" cy="184343"/>
           </a:xfrm>
           <a:prstGeom prst="rect">
@@ -18690,7 +18690,7 @@
         </p:nvSpPr>
         <p:spPr>
           <a:xfrm>
-            <a:off x="6190488" y="3613023"/>
+            <a:off x="6190488" y="3733380"/>
             <a:ext cx="1058600" cy="184343"/>
           </a:xfrm>
           <a:prstGeom prst="rect">
@@ -18734,8 +18734,8 @@
         </p:nvSpPr>
         <p:spPr>
           <a:xfrm>
-            <a:off x="8357615" y="3640454"/>
-            <a:ext cx="502920" cy="244728"/>
+            <a:off x="8357615" y="3760812"/>
+            <a:ext cx="502920" cy="278904"/>
           </a:xfrm>
           <a:prstGeom prst="rect">
             <a:avLst/>
@@ -18773,8 +18773,8 @@
         </p:nvSpPr>
         <p:spPr>
           <a:xfrm>
-            <a:off x="4727448" y="3997071"/>
-            <a:ext cx="1371600" cy="244728"/>
+            <a:off x="4727448" y="4117428"/>
+            <a:ext cx="1371600" cy="278904"/>
           </a:xfrm>
           <a:prstGeom prst="rect">
             <a:avLst/>
@@ -18812,7 +18812,7 @@
         </p:nvSpPr>
         <p:spPr>
           <a:xfrm>
-            <a:off x="6190488" y="3969639"/>
+            <a:off x="6190488" y="4089996"/>
             <a:ext cx="2075687" cy="184343"/>
           </a:xfrm>
           <a:prstGeom prst="rect">
@@ -18856,7 +18856,7 @@
         </p:nvSpPr>
         <p:spPr>
           <a:xfrm>
-            <a:off x="6190488" y="3969639"/>
+            <a:off x="6190488" y="4089996"/>
             <a:ext cx="934059" cy="184343"/>
           </a:xfrm>
           <a:prstGeom prst="rect">
@@ -18900,8 +18900,8 @@
         </p:nvSpPr>
         <p:spPr>
           <a:xfrm>
-            <a:off x="8357615" y="3997071"/>
-            <a:ext cx="502920" cy="244728"/>
+            <a:off x="8357615" y="4117428"/>
+            <a:ext cx="502920" cy="278904"/>
           </a:xfrm>
           <a:prstGeom prst="rect">
             <a:avLst/>
@@ -18939,8 +18939,8 @@
         </p:nvSpPr>
         <p:spPr>
           <a:xfrm>
-            <a:off x="4727448" y="4353687"/>
-            <a:ext cx="1371600" cy="244728"/>
+            <a:off x="4727448" y="4474044"/>
+            <a:ext cx="1371600" cy="278904"/>
           </a:xfrm>
           <a:prstGeom prst="rect">
             <a:avLst/>
@@ -18978,7 +18978,7 @@
         </p:nvSpPr>
         <p:spPr>
           <a:xfrm>
-            <a:off x="6190488" y="4326255"/>
+            <a:off x="6190488" y="4446612"/>
             <a:ext cx="2075687" cy="184343"/>
           </a:xfrm>
           <a:prstGeom prst="rect">
@@ -19022,7 +19022,7 @@
         </p:nvSpPr>
         <p:spPr>
           <a:xfrm>
-            <a:off x="6190488" y="4326255"/>
+            <a:off x="6190488" y="4446612"/>
             <a:ext cx="560435" cy="184343"/>
           </a:xfrm>
           <a:prstGeom prst="rect">
@@ -19066,8 +19066,8 @@
         </p:nvSpPr>
         <p:spPr>
           <a:xfrm>
-            <a:off x="8357615" y="4353687"/>
-            <a:ext cx="502920" cy="244728"/>
+            <a:off x="8357615" y="4474044"/>
+            <a:ext cx="502920" cy="278904"/>
           </a:xfrm>
           <a:prstGeom prst="rect">
             <a:avLst/>
@@ -19105,8 +19105,8 @@
         </p:nvSpPr>
         <p:spPr>
           <a:xfrm>
-            <a:off x="4727448" y="4710303"/>
-            <a:ext cx="1371600" cy="244728"/>
+            <a:off x="4727448" y="4830660"/>
+            <a:ext cx="1371600" cy="278904"/>
           </a:xfrm>
           <a:prstGeom prst="rect">
             <a:avLst/>
@@ -19144,7 +19144,7 @@
         </p:nvSpPr>
         <p:spPr>
           <a:xfrm>
-            <a:off x="6190488" y="4682871"/>
+            <a:off x="6190488" y="4803228"/>
             <a:ext cx="2075687" cy="184343"/>
           </a:xfrm>
           <a:prstGeom prst="rect">
@@ -19188,7 +19188,7 @@
         </p:nvSpPr>
         <p:spPr>
           <a:xfrm>
-            <a:off x="6190488" y="4682871"/>
+            <a:off x="6190488" y="4803228"/>
             <a:ext cx="394380" cy="184343"/>
           </a:xfrm>
           <a:prstGeom prst="rect">
@@ -19232,8 +19232,8 @@
         </p:nvSpPr>
         <p:spPr>
           <a:xfrm>
-            <a:off x="8357615" y="4710303"/>
-            <a:ext cx="502920" cy="244728"/>
+            <a:off x="8357615" y="4830660"/>
+            <a:ext cx="502920" cy="278904"/>
           </a:xfrm>
           <a:prstGeom prst="rect">
             <a:avLst/>
@@ -19271,8 +19271,8 @@
         </p:nvSpPr>
         <p:spPr>
           <a:xfrm>
-            <a:off x="4727448" y="5066919"/>
-            <a:ext cx="1371600" cy="244728"/>
+            <a:off x="4727448" y="5187276"/>
+            <a:ext cx="1371600" cy="278904"/>
           </a:xfrm>
           <a:prstGeom prst="rect">
             <a:avLst/>
@@ -19310,7 +19310,7 @@
         </p:nvSpPr>
         <p:spPr>
           <a:xfrm>
-            <a:off x="6190488" y="5039487"/>
+            <a:off x="6190488" y="5159844"/>
             <a:ext cx="2075687" cy="184343"/>
           </a:xfrm>
           <a:prstGeom prst="rect">
@@ -19354,7 +19354,7 @@
         </p:nvSpPr>
         <p:spPr>
           <a:xfrm>
-            <a:off x="6190488" y="5039487"/>
+            <a:off x="6190488" y="5159844"/>
             <a:ext cx="269839" cy="184343"/>
           </a:xfrm>
           <a:prstGeom prst="rect">
@@ -19398,8 +19398,8 @@
         </p:nvSpPr>
         <p:spPr>
           <a:xfrm>
-            <a:off x="8357615" y="5066919"/>
-            <a:ext cx="502920" cy="244728"/>
+            <a:off x="8357615" y="5187276"/>
+            <a:ext cx="502920" cy="278904"/>
           </a:xfrm>
           <a:prstGeom prst="rect">
             <a:avLst/>
@@ -19437,8 +19437,8 @@
         </p:nvSpPr>
         <p:spPr>
           <a:xfrm>
-            <a:off x="4727448" y="5423535"/>
-            <a:ext cx="1371600" cy="244728"/>
+            <a:off x="4727448" y="5543892"/>
+            <a:ext cx="1371600" cy="278904"/>
           </a:xfrm>
           <a:prstGeom prst="rect">
             <a:avLst/>
@@ -19476,7 +19476,7 @@
         </p:nvSpPr>
         <p:spPr>
           <a:xfrm>
-            <a:off x="6190488" y="5396103"/>
+            <a:off x="6190488" y="5516460"/>
             <a:ext cx="2075687" cy="184343"/>
           </a:xfrm>
           <a:prstGeom prst="rect">
@@ -19520,7 +19520,7 @@
         </p:nvSpPr>
         <p:spPr>
           <a:xfrm>
-            <a:off x="6190488" y="5396103"/>
+            <a:off x="6190488" y="5516460"/>
             <a:ext cx="249082" cy="184343"/>
           </a:xfrm>
           <a:prstGeom prst="rect">
@@ -19564,8 +19564,8 @@
         </p:nvSpPr>
         <p:spPr>
           <a:xfrm>
-            <a:off x="8357615" y="5423535"/>
-            <a:ext cx="502920" cy="244728"/>
+            <a:off x="8357615" y="5543892"/>
+            <a:ext cx="502920" cy="278904"/>
           </a:xfrm>
           <a:prstGeom prst="rect">
             <a:avLst/>
@@ -19603,8 +19603,8 @@
         </p:nvSpPr>
         <p:spPr>
           <a:xfrm>
-            <a:off x="4727448" y="5935599"/>
-            <a:ext cx="20116" cy="790956"/>
+            <a:off x="4727448" y="6055956"/>
+            <a:ext cx="20116" cy="926744"/>
           </a:xfrm>
           <a:prstGeom prst="rect">
             <a:avLst/>
@@ -19647,8 +19647,8 @@
         </p:nvSpPr>
         <p:spPr>
           <a:xfrm>
-            <a:off x="4892040" y="5935599"/>
-            <a:ext cx="4041648" cy="809244"/>
+            <a:off x="4892040" y="6055956"/>
+            <a:ext cx="4041648" cy="945032"/>
           </a:xfrm>
           <a:prstGeom prst="rect">
             <a:avLst/>
@@ -19686,8 +19686,8 @@
         </p:nvSpPr>
         <p:spPr>
           <a:xfrm>
-            <a:off x="9162288" y="2268855"/>
-            <a:ext cx="3017520" cy="211709"/>
+            <a:off x="9162288" y="2389212"/>
+            <a:ext cx="3017520" cy="239941"/>
           </a:xfrm>
           <a:prstGeom prst="rect">
             <a:avLst/>
@@ -19725,8 +19725,8 @@
         </p:nvSpPr>
         <p:spPr>
           <a:xfrm>
-            <a:off x="9162288" y="2543175"/>
-            <a:ext cx="3017520" cy="1589023"/>
+            <a:off x="9162288" y="2663532"/>
+            <a:ext cx="3017520" cy="1832254"/>
           </a:xfrm>
           <a:prstGeom prst="rect">
             <a:avLst/>
@@ -19771,8 +19771,8 @@
         </p:nvSpPr>
         <p:spPr>
           <a:xfrm>
-            <a:off x="9162288" y="2543175"/>
-            <a:ext cx="21945" cy="1589023"/>
+            <a:off x="9162288" y="2663532"/>
+            <a:ext cx="21945" cy="1832254"/>
           </a:xfrm>
           <a:prstGeom prst="rect">
             <a:avLst/>
@@ -19815,8 +19815,8 @@
         </p:nvSpPr>
         <p:spPr>
           <a:xfrm>
-            <a:off x="9308592" y="2662047"/>
-            <a:ext cx="2779776" cy="1369568"/>
+            <a:off x="9308592" y="2782404"/>
+            <a:ext cx="2779776" cy="1612798"/>
           </a:xfrm>
           <a:prstGeom prst="rect">
             <a:avLst/>
@@ -20101,8 +20101,8 @@
         </p:nvSpPr>
         <p:spPr>
           <a:xfrm>
-            <a:off x="9162288" y="4406519"/>
-            <a:ext cx="3017520" cy="1121664"/>
+            <a:off x="9162288" y="4770107"/>
+            <a:ext cx="3017520" cy="1313687"/>
           </a:xfrm>
           <a:prstGeom prst="rect">
             <a:avLst/>
@@ -20141,7 +20141,7 @@
         <p:spPr>
           <a:xfrm>
             <a:off x="566928" y="6455664"/>
-            <a:ext cx="11057839" cy="203454"/>
+            <a:ext cx="11057839" cy="230200"/>
           </a:xfrm>
           <a:prstGeom prst="rect">
             <a:avLst/>
@@ -20242,7 +20242,7 @@
         <p:spPr>
           <a:xfrm>
             <a:off x="566928" y="548640"/>
-            <a:ext cx="457200" cy="252984"/>
+            <a:ext cx="457200" cy="288645"/>
           </a:xfrm>
           <a:prstGeom prst="rect">
             <a:avLst/>
@@ -20281,7 +20281,7 @@
         <p:spPr>
           <a:xfrm>
             <a:off x="1097280" y="475488"/>
-            <a:ext cx="10509199" cy="211709"/>
+            <a:ext cx="10509199" cy="239941"/>
           </a:xfrm>
           <a:prstGeom prst="rect">
             <a:avLst/>
@@ -20320,7 +20320,7 @@
         <p:spPr>
           <a:xfrm>
             <a:off x="1097280" y="667512"/>
-            <a:ext cx="10509199" cy="414909"/>
+            <a:ext cx="10509199" cy="479717"/>
           </a:xfrm>
           <a:prstGeom prst="rect">
             <a:avLst/>
@@ -20359,7 +20359,7 @@
         <p:spPr>
           <a:xfrm>
             <a:off x="566928" y="1344168"/>
-            <a:ext cx="11057839" cy="500634"/>
+            <a:ext cx="11057839" cy="580872"/>
           </a:xfrm>
           <a:prstGeom prst="rect">
             <a:avLst/>
@@ -20397,8 +20397,8 @@
         </p:nvSpPr>
         <p:spPr>
           <a:xfrm>
-            <a:off x="566928" y="2045969"/>
-            <a:ext cx="7132320" cy="1517904"/>
+            <a:off x="566928" y="2126208"/>
+            <a:ext cx="7132320" cy="1499666"/>
           </a:xfrm>
           <a:prstGeom prst="rect">
             <a:avLst/>
@@ -20443,8 +20443,8 @@
         </p:nvSpPr>
         <p:spPr>
           <a:xfrm>
-            <a:off x="566928" y="2045969"/>
-            <a:ext cx="36576" cy="1517904"/>
+            <a:off x="566928" y="2126208"/>
+            <a:ext cx="36576" cy="1499666"/>
           </a:xfrm>
           <a:prstGeom prst="rect">
             <a:avLst/>
@@ -20487,8 +20487,8 @@
         </p:nvSpPr>
         <p:spPr>
           <a:xfrm>
-            <a:off x="859536" y="2228850"/>
-            <a:ext cx="274320" cy="302514"/>
+            <a:off x="859536" y="2309088"/>
+            <a:ext cx="274320" cy="347091"/>
           </a:xfrm>
           <a:prstGeom prst="rect">
             <a:avLst/>
@@ -20526,8 +20526,8 @@
         </p:nvSpPr>
         <p:spPr>
           <a:xfrm>
-            <a:off x="1280160" y="2210562"/>
-            <a:ext cx="6217920" cy="286004"/>
+            <a:off x="1280160" y="2290800"/>
+            <a:ext cx="6217920" cy="327609"/>
           </a:xfrm>
           <a:prstGeom prst="rect">
             <a:avLst/>
@@ -20565,8 +20565,8 @@
         </p:nvSpPr>
         <p:spPr>
           <a:xfrm>
-            <a:off x="1280160" y="2503170"/>
-            <a:ext cx="6217920" cy="877824"/>
+            <a:off x="1280160" y="2565120"/>
+            <a:ext cx="6217920" cy="951026"/>
           </a:xfrm>
           <a:prstGeom prst="rect">
             <a:avLst/>
@@ -20581,11 +20581,11 @@
           <a:p>
             <a:pPr algn="l">
               <a:lnSpc>
-                <a:spcPct val="135000"/>
-              </a:lnSpc>
-            </a:pPr>
-            <a:r>
-              <a:rPr sz="1200" b="0" i="0">
+                <a:spcPct val="130000"/>
+              </a:lnSpc>
+            </a:pPr>
+            <a:r>
+              <a:rPr sz="1150" b="0" i="0">
                 <a:solidFill>
                   <a:srgbClr val="5A6472"/>
                 </a:solidFill>
@@ -20604,8 +20604,8 @@
         </p:nvSpPr>
         <p:spPr>
           <a:xfrm>
-            <a:off x="566928" y="3746754"/>
-            <a:ext cx="7132320" cy="1312164"/>
+            <a:off x="566928" y="3781323"/>
+            <a:ext cx="7132320" cy="1275626"/>
           </a:xfrm>
           <a:prstGeom prst="rect">
             <a:avLst/>
@@ -20650,8 +20650,8 @@
         </p:nvSpPr>
         <p:spPr>
           <a:xfrm>
-            <a:off x="566928" y="3746754"/>
-            <a:ext cx="36576" cy="1312164"/>
+            <a:off x="566928" y="3781323"/>
+            <a:ext cx="36576" cy="1275626"/>
           </a:xfrm>
           <a:prstGeom prst="rect">
             <a:avLst/>
@@ -20694,8 +20694,8 @@
         </p:nvSpPr>
         <p:spPr>
           <a:xfrm>
-            <a:off x="859536" y="3929634"/>
-            <a:ext cx="274320" cy="302514"/>
+            <a:off x="859536" y="3964203"/>
+            <a:ext cx="274320" cy="347091"/>
           </a:xfrm>
           <a:prstGeom prst="rect">
             <a:avLst/>
@@ -20733,8 +20733,8 @@
         </p:nvSpPr>
         <p:spPr>
           <a:xfrm>
-            <a:off x="1280160" y="3911346"/>
-            <a:ext cx="6217920" cy="286004"/>
+            <a:off x="1280160" y="3945915"/>
+            <a:ext cx="6217920" cy="327609"/>
           </a:xfrm>
           <a:prstGeom prst="rect">
             <a:avLst/>
@@ -20772,8 +20772,8 @@
         </p:nvSpPr>
         <p:spPr>
           <a:xfrm>
-            <a:off x="1280160" y="4203954"/>
-            <a:ext cx="6217920" cy="672084"/>
+            <a:off x="1280160" y="4220235"/>
+            <a:ext cx="6217920" cy="726986"/>
           </a:xfrm>
           <a:prstGeom prst="rect">
             <a:avLst/>
@@ -20788,11 +20788,11 @@
           <a:p>
             <a:pPr algn="l">
               <a:lnSpc>
-                <a:spcPct val="135000"/>
-              </a:lnSpc>
-            </a:pPr>
-            <a:r>
-              <a:rPr sz="1200" b="0" i="0">
+                <a:spcPct val="130000"/>
+              </a:lnSpc>
+            </a:pPr>
+            <a:r>
+              <a:rPr sz="1150" b="0" i="0">
                 <a:solidFill>
                   <a:srgbClr val="5A6472"/>
                 </a:solidFill>
@@ -20811,8 +20811,8 @@
         </p:nvSpPr>
         <p:spPr>
           <a:xfrm>
-            <a:off x="566928" y="5241798"/>
-            <a:ext cx="7132320" cy="1312164"/>
+            <a:off x="566928" y="5212397"/>
+            <a:ext cx="7132320" cy="1275626"/>
           </a:xfrm>
           <a:prstGeom prst="rect">
             <a:avLst/>
@@ -20857,8 +20857,8 @@
         </p:nvSpPr>
         <p:spPr>
           <a:xfrm>
-            <a:off x="566928" y="5241798"/>
-            <a:ext cx="36576" cy="1312164"/>
+            <a:off x="566928" y="5212397"/>
+            <a:ext cx="36576" cy="1275626"/>
           </a:xfrm>
           <a:prstGeom prst="rect">
             <a:avLst/>
@@ -20901,8 +20901,8 @@
         </p:nvSpPr>
         <p:spPr>
           <a:xfrm>
-            <a:off x="859536" y="5424678"/>
-            <a:ext cx="274320" cy="302514"/>
+            <a:off x="859536" y="5395277"/>
+            <a:ext cx="274320" cy="347091"/>
           </a:xfrm>
           <a:prstGeom prst="rect">
             <a:avLst/>
@@ -20940,8 +20940,8 @@
         </p:nvSpPr>
         <p:spPr>
           <a:xfrm>
-            <a:off x="1280160" y="5406390"/>
-            <a:ext cx="6217920" cy="286004"/>
+            <a:off x="1280160" y="5376989"/>
+            <a:ext cx="6217920" cy="327609"/>
           </a:xfrm>
           <a:prstGeom prst="rect">
             <a:avLst/>
@@ -20979,8 +20979,8 @@
         </p:nvSpPr>
         <p:spPr>
           <a:xfrm>
-            <a:off x="1280160" y="5698998"/>
-            <a:ext cx="6217920" cy="672084"/>
+            <a:off x="1280160" y="5651309"/>
+            <a:ext cx="6217920" cy="726986"/>
           </a:xfrm>
           <a:prstGeom prst="rect">
             <a:avLst/>
@@ -20995,11 +20995,11 @@
           <a:p>
             <a:pPr algn="l">
               <a:lnSpc>
-                <a:spcPct val="135000"/>
-              </a:lnSpc>
-            </a:pPr>
-            <a:r>
-              <a:rPr sz="1200" b="0" i="0">
+                <a:spcPct val="130000"/>
+              </a:lnSpc>
+            </a:pPr>
+            <a:r>
+              <a:rPr sz="1150" b="0" i="0">
                 <a:solidFill>
                   <a:srgbClr val="5A6472"/>
                 </a:solidFill>
@@ -21018,8 +21018,8 @@
         </p:nvSpPr>
         <p:spPr>
           <a:xfrm>
-            <a:off x="8019288" y="2045969"/>
-            <a:ext cx="3605479" cy="211709"/>
+            <a:off x="8019288" y="2126208"/>
+            <a:ext cx="3605479" cy="239941"/>
           </a:xfrm>
           <a:prstGeom prst="rect">
             <a:avLst/>
@@ -21057,8 +21057,8 @@
         </p:nvSpPr>
         <p:spPr>
           <a:xfrm>
-            <a:off x="8019288" y="2320289"/>
-            <a:ext cx="3559759" cy="721613"/>
+            <a:off x="8019288" y="2400528"/>
+            <a:ext cx="3559759" cy="841629"/>
           </a:xfrm>
           <a:prstGeom prst="rect">
             <a:avLst/>
@@ -21096,8 +21096,8 @@
         </p:nvSpPr>
         <p:spPr>
           <a:xfrm>
-            <a:off x="8019288" y="3279647"/>
-            <a:ext cx="3559759" cy="1388364"/>
+            <a:off x="8019288" y="3479901"/>
+            <a:ext cx="3559759" cy="1628394"/>
           </a:xfrm>
           <a:prstGeom prst="rect">
             <a:avLst/>
@@ -21135,7 +21135,7 @@
         </p:nvSpPr>
         <p:spPr>
           <a:xfrm>
-            <a:off x="8019288" y="4978907"/>
+            <a:off x="8019288" y="5419191"/>
             <a:ext cx="3559759" cy="749808"/>
           </a:xfrm>
           <a:prstGeom prst="rect">
@@ -21179,8 +21179,8 @@
         </p:nvSpPr>
         <p:spPr>
           <a:xfrm>
-            <a:off x="8238744" y="5161788"/>
-            <a:ext cx="3102559" cy="484124"/>
+            <a:off x="8238744" y="5602071"/>
+            <a:ext cx="3102559" cy="561390"/>
           </a:xfrm>
           <a:prstGeom prst="rect">
             <a:avLst/>
@@ -21246,7 +21246,7 @@
         <p:spPr>
           <a:xfrm>
             <a:off x="566928" y="6455664"/>
-            <a:ext cx="11057839" cy="203454"/>
+            <a:ext cx="11057839" cy="230200"/>
           </a:xfrm>
           <a:prstGeom prst="rect">
             <a:avLst/>
@@ -21347,7 +21347,7 @@
         <p:spPr>
           <a:xfrm>
             <a:off x="566928" y="548640"/>
-            <a:ext cx="457200" cy="252984"/>
+            <a:ext cx="457200" cy="288645"/>
           </a:xfrm>
           <a:prstGeom prst="rect">
             <a:avLst/>
@@ -21386,7 +21386,7 @@
         <p:spPr>
           <a:xfrm>
             <a:off x="1097280" y="475488"/>
-            <a:ext cx="10509199" cy="211709"/>
+            <a:ext cx="10509199" cy="239941"/>
           </a:xfrm>
           <a:prstGeom prst="rect">
             <a:avLst/>
@@ -21425,7 +21425,7 @@
         <p:spPr>
           <a:xfrm>
             <a:off x="1097280" y="667512"/>
-            <a:ext cx="10509199" cy="414909"/>
+            <a:ext cx="10509199" cy="479717"/>
           </a:xfrm>
           <a:prstGeom prst="rect">
             <a:avLst/>
@@ -21554,7 +21554,7 @@
         <p:spPr>
           <a:xfrm>
             <a:off x="877824" y="1746504"/>
-            <a:ext cx="5001768" cy="211709"/>
+            <a:ext cx="5001768" cy="239941"/>
           </a:xfrm>
           <a:prstGeom prst="rect">
             <a:avLst/>
@@ -21593,7 +21593,7 @@
         <p:spPr>
           <a:xfrm>
             <a:off x="877824" y="2093976"/>
-            <a:ext cx="219456" cy="269494"/>
+            <a:ext cx="219456" cy="308127"/>
           </a:xfrm>
           <a:prstGeom prst="rect">
             <a:avLst/>
@@ -21632,7 +21632,7 @@
         <p:spPr>
           <a:xfrm>
             <a:off x="1152144" y="2093976"/>
-            <a:ext cx="4727448" cy="484124"/>
+            <a:ext cx="4727448" cy="561390"/>
           </a:xfrm>
           <a:prstGeom prst="rect">
             <a:avLst/>
@@ -21688,8 +21688,8 @@
         </p:nvSpPr>
         <p:spPr>
           <a:xfrm>
-            <a:off x="877824" y="2760980"/>
-            <a:ext cx="219456" cy="269494"/>
+            <a:off x="877824" y="2838246"/>
+            <a:ext cx="219456" cy="308127"/>
           </a:xfrm>
           <a:prstGeom prst="rect">
             <a:avLst/>
@@ -21727,8 +21727,8 @@
         </p:nvSpPr>
         <p:spPr>
           <a:xfrm>
-            <a:off x="1152144" y="2760980"/>
-            <a:ext cx="4727448" cy="269494"/>
+            <a:off x="1152144" y="2838246"/>
+            <a:ext cx="4727448" cy="308127"/>
           </a:xfrm>
           <a:prstGeom prst="rect">
             <a:avLst/>
@@ -21766,8 +21766,8 @@
         </p:nvSpPr>
         <p:spPr>
           <a:xfrm>
-            <a:off x="877824" y="3213354"/>
-            <a:ext cx="219456" cy="269494"/>
+            <a:off x="877824" y="3329254"/>
+            <a:ext cx="219456" cy="308127"/>
           </a:xfrm>
           <a:prstGeom prst="rect">
             <a:avLst/>
@@ -21805,8 +21805,8 @@
         </p:nvSpPr>
         <p:spPr>
           <a:xfrm>
-            <a:off x="1152144" y="3213354"/>
-            <a:ext cx="4727448" cy="484124"/>
+            <a:off x="1152144" y="3329254"/>
+            <a:ext cx="4727448" cy="561390"/>
           </a:xfrm>
           <a:prstGeom prst="rect">
             <a:avLst/>
@@ -21844,8 +21844,8 @@
         </p:nvSpPr>
         <p:spPr>
           <a:xfrm>
-            <a:off x="877824" y="3880358"/>
-            <a:ext cx="219456" cy="269494"/>
+            <a:off x="877824" y="4073524"/>
+            <a:ext cx="219456" cy="308127"/>
           </a:xfrm>
           <a:prstGeom prst="rect">
             <a:avLst/>
@@ -21883,8 +21883,8 @@
         </p:nvSpPr>
         <p:spPr>
           <a:xfrm>
-            <a:off x="1152144" y="3880358"/>
-            <a:ext cx="4727448" cy="269494"/>
+            <a:off x="1152144" y="4073524"/>
+            <a:ext cx="4727448" cy="308127"/>
           </a:xfrm>
           <a:prstGeom prst="rect">
             <a:avLst/>
@@ -21922,8 +21922,8 @@
         </p:nvSpPr>
         <p:spPr>
           <a:xfrm>
-            <a:off x="877824" y="4332732"/>
-            <a:ext cx="219456" cy="269494"/>
+            <a:off x="877824" y="4564532"/>
+            <a:ext cx="219456" cy="308127"/>
           </a:xfrm>
           <a:prstGeom prst="rect">
             <a:avLst/>
@@ -21961,8 +21961,8 @@
         </p:nvSpPr>
         <p:spPr>
           <a:xfrm>
-            <a:off x="1152144" y="4332732"/>
-            <a:ext cx="4727448" cy="269494"/>
+            <a:off x="1152144" y="4564532"/>
+            <a:ext cx="4727448" cy="308127"/>
           </a:xfrm>
           <a:prstGeom prst="rect">
             <a:avLst/>
@@ -22109,7 +22109,7 @@
         <p:spPr>
           <a:xfrm>
             <a:off x="6867144" y="1746504"/>
-            <a:ext cx="5001768" cy="211709"/>
+            <a:ext cx="5001768" cy="239941"/>
           </a:xfrm>
           <a:prstGeom prst="rect">
             <a:avLst/>
@@ -22148,7 +22148,7 @@
         <p:spPr>
           <a:xfrm>
             <a:off x="6867144" y="2093976"/>
-            <a:ext cx="219456" cy="269494"/>
+            <a:ext cx="219456" cy="308127"/>
           </a:xfrm>
           <a:prstGeom prst="rect">
             <a:avLst/>
@@ -22187,7 +22187,7 @@
         <p:spPr>
           <a:xfrm>
             <a:off x="7141464" y="2093976"/>
-            <a:ext cx="4727448" cy="484124"/>
+            <a:ext cx="4727448" cy="561390"/>
           </a:xfrm>
           <a:prstGeom prst="rect">
             <a:avLst/>
@@ -22225,8 +22225,8 @@
         </p:nvSpPr>
         <p:spPr>
           <a:xfrm>
-            <a:off x="6867144" y="2760980"/>
-            <a:ext cx="219456" cy="269494"/>
+            <a:off x="6867144" y="2838246"/>
+            <a:ext cx="219456" cy="308127"/>
           </a:xfrm>
           <a:prstGeom prst="rect">
             <a:avLst/>
@@ -22264,8 +22264,8 @@
         </p:nvSpPr>
         <p:spPr>
           <a:xfrm>
-            <a:off x="7141464" y="2760980"/>
-            <a:ext cx="4727448" cy="269494"/>
+            <a:off x="7141464" y="2838246"/>
+            <a:ext cx="4727448" cy="308127"/>
           </a:xfrm>
           <a:prstGeom prst="rect">
             <a:avLst/>
@@ -22303,8 +22303,8 @@
         </p:nvSpPr>
         <p:spPr>
           <a:xfrm>
-            <a:off x="6867144" y="3213354"/>
-            <a:ext cx="219456" cy="269494"/>
+            <a:off x="6867144" y="3329254"/>
+            <a:ext cx="219456" cy="308127"/>
           </a:xfrm>
           <a:prstGeom prst="rect">
             <a:avLst/>
@@ -22342,8 +22342,8 @@
         </p:nvSpPr>
         <p:spPr>
           <a:xfrm>
-            <a:off x="7141464" y="3213354"/>
-            <a:ext cx="4727448" cy="484124"/>
+            <a:off x="7141464" y="3329254"/>
+            <a:ext cx="4727448" cy="561390"/>
           </a:xfrm>
           <a:prstGeom prst="rect">
             <a:avLst/>
@@ -22381,8 +22381,8 @@
         </p:nvSpPr>
         <p:spPr>
           <a:xfrm>
-            <a:off x="6867144" y="3880358"/>
-            <a:ext cx="219456" cy="269494"/>
+            <a:off x="6867144" y="4073524"/>
+            <a:ext cx="219456" cy="308127"/>
           </a:xfrm>
           <a:prstGeom prst="rect">
             <a:avLst/>
@@ -22420,8 +22420,8 @@
         </p:nvSpPr>
         <p:spPr>
           <a:xfrm>
-            <a:off x="7141464" y="3880358"/>
-            <a:ext cx="4727448" cy="484124"/>
+            <a:off x="7141464" y="4073524"/>
+            <a:ext cx="4727448" cy="561390"/>
           </a:xfrm>
           <a:prstGeom prst="rect">
             <a:avLst/>
@@ -22459,8 +22459,8 @@
         </p:nvSpPr>
         <p:spPr>
           <a:xfrm>
-            <a:off x="6867144" y="4547362"/>
-            <a:ext cx="219456" cy="269494"/>
+            <a:off x="6867144" y="4817795"/>
+            <a:ext cx="219456" cy="308127"/>
           </a:xfrm>
           <a:prstGeom prst="rect">
             <a:avLst/>
@@ -22498,8 +22498,8 @@
         </p:nvSpPr>
         <p:spPr>
           <a:xfrm>
-            <a:off x="7141464" y="4547362"/>
-            <a:ext cx="4727448" cy="269494"/>
+            <a:off x="7141464" y="4817795"/>
+            <a:ext cx="4727448" cy="308127"/>
           </a:xfrm>
           <a:prstGeom prst="rect">
             <a:avLst/>
@@ -22538,7 +22538,7 @@
         <p:spPr>
           <a:xfrm>
             <a:off x="566928" y="4864608"/>
-            <a:ext cx="11057839" cy="211709"/>
+            <a:ext cx="11057839" cy="239941"/>
           </a:xfrm>
           <a:prstGeom prst="rect">
             <a:avLst/>
@@ -22621,7 +22621,7 @@
         <p:spPr>
           <a:xfrm>
             <a:off x="768096" y="5376672"/>
-            <a:ext cx="256032" cy="269494"/>
+            <a:ext cx="256032" cy="308127"/>
           </a:xfrm>
           <a:prstGeom prst="rect">
             <a:avLst/>
@@ -22660,7 +22660,7 @@
         <p:spPr>
           <a:xfrm>
             <a:off x="1115568" y="5312664"/>
-            <a:ext cx="2789834" cy="252984"/>
+            <a:ext cx="2789834" cy="288645"/>
           </a:xfrm>
           <a:prstGeom prst="rect">
             <a:avLst/>
@@ -22743,7 +22743,7 @@
         <p:spPr>
           <a:xfrm>
             <a:off x="4527194" y="5376672"/>
-            <a:ext cx="256032" cy="269494"/>
+            <a:ext cx="256032" cy="308127"/>
           </a:xfrm>
           <a:prstGeom prst="rect">
             <a:avLst/>
@@ -22782,7 +22782,7 @@
         <p:spPr>
           <a:xfrm>
             <a:off x="4874666" y="5312664"/>
-            <a:ext cx="2789834" cy="451104"/>
+            <a:ext cx="2789834" cy="522427"/>
           </a:xfrm>
           <a:prstGeom prst="rect">
             <a:avLst/>
@@ -22865,7 +22865,7 @@
         <p:spPr>
           <a:xfrm>
             <a:off x="8286292" y="5376672"/>
-            <a:ext cx="256032" cy="269494"/>
+            <a:ext cx="256032" cy="308127"/>
           </a:xfrm>
           <a:prstGeom prst="rect">
             <a:avLst/>
@@ -22904,7 +22904,7 @@
         <p:spPr>
           <a:xfrm>
             <a:off x="8633764" y="5312664"/>
-            <a:ext cx="2789834" cy="451104"/>
+            <a:ext cx="2789834" cy="522427"/>
           </a:xfrm>
           <a:prstGeom prst="rect">
             <a:avLst/>
@@ -22943,7 +22943,7 @@
         <p:spPr>
           <a:xfrm>
             <a:off x="566928" y="6455664"/>
-            <a:ext cx="11057839" cy="203454"/>
+            <a:ext cx="11057839" cy="230200"/>
           </a:xfrm>
           <a:prstGeom prst="rect">
             <a:avLst/>
@@ -23044,7 +23044,7 @@
         <p:spPr>
           <a:xfrm>
             <a:off x="566928" y="548640"/>
-            <a:ext cx="457200" cy="252984"/>
+            <a:ext cx="457200" cy="288645"/>
           </a:xfrm>
           <a:prstGeom prst="rect">
             <a:avLst/>
@@ -23083,7 +23083,7 @@
         <p:spPr>
           <a:xfrm>
             <a:off x="1097280" y="475488"/>
-            <a:ext cx="10509199" cy="211709"/>
+            <a:ext cx="10509199" cy="239941"/>
           </a:xfrm>
           <a:prstGeom prst="rect">
             <a:avLst/>
@@ -23122,7 +23122,7 @@
         <p:spPr>
           <a:xfrm>
             <a:off x="1097280" y="667512"/>
-            <a:ext cx="10509199" cy="414909"/>
+            <a:ext cx="10509199" cy="479717"/>
           </a:xfrm>
           <a:prstGeom prst="rect">
             <a:avLst/>
@@ -23161,7 +23161,7 @@
         <p:spPr>
           <a:xfrm>
             <a:off x="566928" y="1344168"/>
-            <a:ext cx="11057839" cy="500634"/>
+            <a:ext cx="11057839" cy="580872"/>
           </a:xfrm>
           <a:prstGeom prst="rect">
             <a:avLst/>
@@ -23199,7 +23199,7 @@
         </p:nvSpPr>
         <p:spPr>
           <a:xfrm>
-            <a:off x="566928" y="2045969"/>
+            <a:off x="566928" y="2126208"/>
             <a:ext cx="5623560" cy="2697480"/>
           </a:xfrm>
           <a:prstGeom prst="rect">
@@ -23245,7 +23245,7 @@
         </p:nvSpPr>
         <p:spPr>
           <a:xfrm>
-            <a:off x="566928" y="2045969"/>
+            <a:off x="566928" y="2126208"/>
             <a:ext cx="5623560" cy="45720"/>
           </a:xfrm>
           <a:prstGeom prst="rect">
@@ -23289,7 +23289,7 @@
         </p:nvSpPr>
         <p:spPr>
           <a:xfrm>
-            <a:off x="877824" y="2375153"/>
+            <a:off x="877824" y="2455392"/>
             <a:ext cx="502920" cy="201168"/>
           </a:xfrm>
           <a:prstGeom prst="rect">
@@ -23342,8 +23342,8 @@
         </p:nvSpPr>
         <p:spPr>
           <a:xfrm>
-            <a:off x="1545336" y="2393441"/>
-            <a:ext cx="4023360" cy="228219"/>
+            <a:off x="1545336" y="2473680"/>
+            <a:ext cx="4023360" cy="259422"/>
           </a:xfrm>
           <a:prstGeom prst="rect">
             <a:avLst/>
@@ -23381,8 +23381,8 @@
         </p:nvSpPr>
         <p:spPr>
           <a:xfrm>
-            <a:off x="877824" y="2795777"/>
-            <a:ext cx="5001768" cy="1491234"/>
+            <a:off x="877824" y="2876016"/>
+            <a:ext cx="5001768" cy="1749780"/>
           </a:xfrm>
           <a:prstGeom prst="rect">
             <a:avLst/>
@@ -23420,7 +23420,7 @@
         </p:nvSpPr>
         <p:spPr>
           <a:xfrm>
-            <a:off x="6556248" y="2045969"/>
+            <a:off x="6556248" y="2126208"/>
             <a:ext cx="5623560" cy="2697480"/>
           </a:xfrm>
           <a:prstGeom prst="rect">
@@ -23466,7 +23466,7 @@
         </p:nvSpPr>
         <p:spPr>
           <a:xfrm>
-            <a:off x="6556248" y="2045969"/>
+            <a:off x="6556248" y="2126208"/>
             <a:ext cx="5623560" cy="45720"/>
           </a:xfrm>
           <a:prstGeom prst="rect">
@@ -23510,7 +23510,7 @@
         </p:nvSpPr>
         <p:spPr>
           <a:xfrm>
-            <a:off x="6867144" y="2375153"/>
+            <a:off x="6867144" y="2455392"/>
             <a:ext cx="360273" cy="201168"/>
           </a:xfrm>
           <a:prstGeom prst="rect">
@@ -23563,8 +23563,8 @@
         </p:nvSpPr>
         <p:spPr>
           <a:xfrm>
-            <a:off x="7392009" y="2393441"/>
-            <a:ext cx="4023360" cy="228219"/>
+            <a:off x="7392009" y="2473680"/>
+            <a:ext cx="4023360" cy="259422"/>
           </a:xfrm>
           <a:prstGeom prst="rect">
             <a:avLst/>
@@ -23602,8 +23602,8 @@
         </p:nvSpPr>
         <p:spPr>
           <a:xfrm>
-            <a:off x="6867144" y="2795777"/>
-            <a:ext cx="5001768" cy="1012443"/>
+            <a:off x="6867144" y="2876016"/>
+            <a:ext cx="5001768" cy="1184808"/>
           </a:xfrm>
           <a:prstGeom prst="rect">
             <a:avLst/>
@@ -23641,8 +23641,8 @@
         </p:nvSpPr>
         <p:spPr>
           <a:xfrm>
-            <a:off x="566928" y="5154930"/>
-            <a:ext cx="11057839" cy="211709"/>
+            <a:off x="566928" y="5235168"/>
+            <a:ext cx="11057839" cy="239941"/>
           </a:xfrm>
           <a:prstGeom prst="rect">
             <a:avLst/>
@@ -23680,7 +23680,7 @@
         </p:nvSpPr>
         <p:spPr>
           <a:xfrm>
-            <a:off x="566928" y="5429250"/>
+            <a:off x="566928" y="5509488"/>
             <a:ext cx="11057839" cy="777240"/>
           </a:xfrm>
           <a:prstGeom prst="rect">
@@ -23724,7 +23724,7 @@
         </p:nvSpPr>
         <p:spPr>
           <a:xfrm>
-            <a:off x="566928" y="5429250"/>
+            <a:off x="566928" y="5509488"/>
             <a:ext cx="36576" cy="777240"/>
           </a:xfrm>
           <a:prstGeom prst="rect">
@@ -23768,8 +23768,8 @@
         </p:nvSpPr>
         <p:spPr>
           <a:xfrm>
-            <a:off x="877824" y="5630418"/>
-            <a:ext cx="10417759" cy="517779"/>
+            <a:off x="877824" y="5710656"/>
+            <a:ext cx="10417759" cy="601103"/>
           </a:xfrm>
           <a:prstGeom prst="rect">
             <a:avLst/>
@@ -23835,7 +23835,7 @@
         <p:spPr>
           <a:xfrm>
             <a:off x="566928" y="6455664"/>
-            <a:ext cx="11057839" cy="203454"/>
+            <a:ext cx="11057839" cy="230200"/>
           </a:xfrm>
           <a:prstGeom prst="rect">
             <a:avLst/>
@@ -23936,7 +23936,7 @@
         <p:spPr>
           <a:xfrm>
             <a:off x="566928" y="548640"/>
-            <a:ext cx="457200" cy="252984"/>
+            <a:ext cx="457200" cy="288645"/>
           </a:xfrm>
           <a:prstGeom prst="rect">
             <a:avLst/>
@@ -23975,7 +23975,7 @@
         <p:spPr>
           <a:xfrm>
             <a:off x="1097280" y="475488"/>
-            <a:ext cx="10509199" cy="211709"/>
+            <a:ext cx="10509199" cy="239941"/>
           </a:xfrm>
           <a:prstGeom prst="rect">
             <a:avLst/>
@@ -24014,7 +24014,7 @@
         <p:spPr>
           <a:xfrm>
             <a:off x="1097280" y="667512"/>
-            <a:ext cx="10509199" cy="414909"/>
+            <a:ext cx="10509199" cy="479717"/>
           </a:xfrm>
           <a:prstGeom prst="rect">
             <a:avLst/>
@@ -24053,7 +24053,7 @@
         <p:spPr>
           <a:xfrm>
             <a:off x="566928" y="1344168"/>
-            <a:ext cx="11057839" cy="500634"/>
+            <a:ext cx="11057839" cy="580872"/>
           </a:xfrm>
           <a:prstGeom prst="rect">
             <a:avLst/>
@@ -24091,8 +24091,8 @@
         </p:nvSpPr>
         <p:spPr>
           <a:xfrm>
-            <a:off x="566928" y="2137410"/>
-            <a:ext cx="3004754" cy="195199"/>
+            <a:off x="566928" y="2217648"/>
+            <a:ext cx="3004754" cy="220459"/>
           </a:xfrm>
           <a:prstGeom prst="rect">
             <a:avLst/>
@@ -24130,8 +24130,8 @@
         </p:nvSpPr>
         <p:spPr>
           <a:xfrm>
-            <a:off x="3663122" y="2137410"/>
-            <a:ext cx="2120127" cy="195199"/>
+            <a:off x="3663122" y="2217648"/>
+            <a:ext cx="2120127" cy="220459"/>
           </a:xfrm>
           <a:prstGeom prst="rect">
             <a:avLst/>
@@ -24169,8 +24169,8 @@
         </p:nvSpPr>
         <p:spPr>
           <a:xfrm>
-            <a:off x="5874690" y="2137410"/>
-            <a:ext cx="5658636" cy="195199"/>
+            <a:off x="5874690" y="2217648"/>
+            <a:ext cx="5658636" cy="220459"/>
           </a:xfrm>
           <a:prstGeom prst="rect">
             <a:avLst/>
@@ -24208,7 +24208,7 @@
         </p:nvSpPr>
         <p:spPr>
           <a:xfrm>
-            <a:off x="566928" y="2375154"/>
+            <a:off x="566928" y="2455392"/>
             <a:ext cx="11057839" cy="8229"/>
           </a:xfrm>
           <a:prstGeom prst="rect">
@@ -24252,8 +24252,8 @@
         </p:nvSpPr>
         <p:spPr>
           <a:xfrm>
-            <a:off x="566928" y="2466594"/>
-            <a:ext cx="3004754" cy="261239"/>
+            <a:off x="566928" y="2546832"/>
+            <a:ext cx="3004754" cy="298386"/>
           </a:xfrm>
           <a:prstGeom prst="rect">
             <a:avLst/>
@@ -24309,7 +24309,7 @@
         </p:nvSpPr>
         <p:spPr>
           <a:xfrm>
-            <a:off x="3663122" y="2484882"/>
+            <a:off x="3663122" y="2565120"/>
             <a:ext cx="502920" cy="201168"/>
           </a:xfrm>
           <a:prstGeom prst="rect">
@@ -24362,8 +24362,8 @@
         </p:nvSpPr>
         <p:spPr>
           <a:xfrm>
-            <a:off x="5874690" y="2466594"/>
-            <a:ext cx="5658636" cy="673989"/>
+            <a:off x="5874690" y="2546832"/>
+            <a:ext cx="5658636" cy="785431"/>
           </a:xfrm>
           <a:prstGeom prst="rect">
             <a:avLst/>
@@ -24401,7 +24401,7 @@
         </p:nvSpPr>
         <p:spPr>
           <a:xfrm>
-            <a:off x="566928" y="3241167"/>
+            <a:off x="566928" y="3432848"/>
             <a:ext cx="11057839" cy="8229"/>
           </a:xfrm>
           <a:prstGeom prst="rect">
@@ -24445,8 +24445,8 @@
         </p:nvSpPr>
         <p:spPr>
           <a:xfrm>
-            <a:off x="566928" y="3396615"/>
-            <a:ext cx="3004754" cy="261239"/>
+            <a:off x="566928" y="3588296"/>
+            <a:ext cx="3004754" cy="298386"/>
           </a:xfrm>
           <a:prstGeom prst="rect">
             <a:avLst/>
@@ -24502,7 +24502,7 @@
         </p:nvSpPr>
         <p:spPr>
           <a:xfrm>
-            <a:off x="3663122" y="3414903"/>
+            <a:off x="3663122" y="3606584"/>
             <a:ext cx="1287475" cy="201168"/>
           </a:xfrm>
           <a:prstGeom prst="rect">
@@ -24555,8 +24555,8 @@
         </p:nvSpPr>
         <p:spPr>
           <a:xfrm>
-            <a:off x="5874690" y="3396615"/>
-            <a:ext cx="5658636" cy="673989"/>
+            <a:off x="5874690" y="3588296"/>
+            <a:ext cx="5658636" cy="785431"/>
           </a:xfrm>
           <a:prstGeom prst="rect">
             <a:avLst/>
@@ -24594,7 +24594,7 @@
         </p:nvSpPr>
         <p:spPr>
           <a:xfrm>
-            <a:off x="566928" y="4171188"/>
+            <a:off x="566928" y="4474311"/>
             <a:ext cx="11057839" cy="8229"/>
           </a:xfrm>
           <a:prstGeom prst="rect">
@@ -24638,8 +24638,8 @@
         </p:nvSpPr>
         <p:spPr>
           <a:xfrm>
-            <a:off x="566928" y="4326636"/>
-            <a:ext cx="3004754" cy="467614"/>
+            <a:off x="566928" y="4629759"/>
+            <a:ext cx="3004754" cy="541909"/>
           </a:xfrm>
           <a:prstGeom prst="rect">
             <a:avLst/>
@@ -24695,7 +24695,7 @@
         </p:nvSpPr>
         <p:spPr>
           <a:xfrm>
-            <a:off x="3663122" y="4344924"/>
+            <a:off x="3663122" y="4648047"/>
             <a:ext cx="1287475" cy="201168"/>
           </a:xfrm>
           <a:prstGeom prst="rect">
@@ -24748,8 +24748,8 @@
         </p:nvSpPr>
         <p:spPr>
           <a:xfrm>
-            <a:off x="5874690" y="4326636"/>
-            <a:ext cx="5658636" cy="467614"/>
+            <a:off x="5874690" y="4629759"/>
+            <a:ext cx="5658636" cy="541909"/>
           </a:xfrm>
           <a:prstGeom prst="rect">
             <a:avLst/>
@@ -24787,7 +24787,7 @@
         </p:nvSpPr>
         <p:spPr>
           <a:xfrm>
-            <a:off x="566928" y="4894834"/>
+            <a:off x="566928" y="5272252"/>
             <a:ext cx="11057839" cy="8229"/>
           </a:xfrm>
           <a:prstGeom prst="rect">
@@ -24831,8 +24831,8 @@
         </p:nvSpPr>
         <p:spPr>
           <a:xfrm>
-            <a:off x="566928" y="5050282"/>
-            <a:ext cx="3004754" cy="467614"/>
+            <a:off x="566928" y="5427700"/>
+            <a:ext cx="3004754" cy="541909"/>
           </a:xfrm>
           <a:prstGeom prst="rect">
             <a:avLst/>
@@ -24888,7 +24888,7 @@
         </p:nvSpPr>
         <p:spPr>
           <a:xfrm>
-            <a:off x="3663122" y="5068570"/>
+            <a:off x="3663122" y="5445988"/>
             <a:ext cx="716889" cy="201168"/>
           </a:xfrm>
           <a:prstGeom prst="rect">
@@ -24941,8 +24941,8 @@
         </p:nvSpPr>
         <p:spPr>
           <a:xfrm>
-            <a:off x="5874690" y="5050282"/>
-            <a:ext cx="5658636" cy="467614"/>
+            <a:off x="5874690" y="5427700"/>
+            <a:ext cx="5658636" cy="541909"/>
           </a:xfrm>
           <a:prstGeom prst="rect">
             <a:avLst/>
@@ -24981,7 +24981,7 @@
         <p:spPr>
           <a:xfrm>
             <a:off x="566928" y="6455664"/>
-            <a:ext cx="11057839" cy="203454"/>
+            <a:ext cx="11057839" cy="230200"/>
           </a:xfrm>
           <a:prstGeom prst="rect">
             <a:avLst/>
